--- a/results/weekly_report_20260904.pptx
+++ b/results/weekly_report_20260904.pptx
@@ -8140,7 +8140,7 @@
                 <a:ea typeface="Calibri" pitchFamily="34" charset="-122"/>
                 <a:cs typeface="Calibri" pitchFamily="34" charset="-120"/>
               </a:rPr>
-              <a:t>QVF ledger vs direct: +42.0 pp, chain-cluster bootstrap 95% CI [37.0, 46.9]. Full-text + protocol reaches 86.6 at 4.7× the input tokens and 1.6× the latency; the plain full-text reader stays at 54.5. Owner-gate store −3.0 (p = 0.04 on 576) → gate stays off by default. On the original 576 questions the headline is 89.06 vs 47.57 (+41.5).</a:t>
+              <a:t>QVF ledger vs direct: +42.0 pp, chain-cluster bootstrap 95% CI [37.0, 46.9]. Full-text + protocol reaches 86.6 at 4.7× the input tokens and 1.6× the latency; the plain full-text reader stays at 54.5. Owner-gate store −3.0 (p = 0.04 on 576) → gate stays off by default. On the original 576 questions the headline is 89.06 vs 47.57 (+41.5). Partial rerun on the v2.5 corpus with a new store (batch 35, 36 chains / 140 q): direct 49.3 · compile 70.7 · QVF 90.7 (+41.4, CI [30.9, 51.4]); paired vs the v2.4 store on the same 140 questions: −1.4 / −5.0 / −0.7, all n.s.</a:t>
             </a:r>
             <a:endParaRPr lang="en-US" sz="1150" dirty="0"/>
           </a:p>
@@ -12574,7 +12574,7 @@
                           <a:ea typeface="Calibri" pitchFamily="34" charset="-122"/>
                           <a:cs typeface="Calibri" pitchFamily="34" charset="-120"/>
                         </a:rPr>
-                        <a:t>Corpus versions v2.2 / v2.3 / v2.4</a:t>
+                        <a:t>Corpus versions v2.2 → v2.5</a:t>
                       </a:r>
                       <a:endParaRPr lang="en-US" sz="1100" dirty="0">
                         <a:latin typeface="Calibri" charset="0"/>
@@ -12642,7 +12642,7 @@
                           <a:ea typeface="Calibri" pitchFamily="34" charset="-122"/>
                           <a:cs typeface="Calibri" pitchFamily="34" charset="-120"/>
                         </a:rPr>
-                        <a:t>scores statistically indistinguishable</a:t>
+                        <a:t>v2.2–v2.4 indistinguishable; v2.5 partial rerun (36 chains, new store) paired vs v2.4 store: direct −1.4 · compile −5.0 · QVF −0.7, all n.s.; the 24 untouched chains drift by the same −2 to −5 (rebuild noise)</a:t>
                       </a:r>
                       <a:endParaRPr lang="en-US" sz="1100" dirty="0">
                         <a:latin typeface="Calibri" charset="0"/>
@@ -12710,7 +12710,7 @@
                           <a:ea typeface="Calibri" pitchFamily="34" charset="-122"/>
                           <a:cs typeface="Calibri" pitchFamily="34" charset="-120"/>
                         </a:rPr>
-                        <a:t>cleaning has saturated; v2.5 rerun in progress</a:t>
+                        <a:t>cleaning has saturated; no v2.5 penalty</a:t>
                       </a:r>
                       <a:endParaRPr lang="en-US" sz="1100" dirty="0">
                         <a:latin typeface="Calibri" charset="0"/>
@@ -18534,7 +18534,7 @@
                 <a:ea typeface="Calibri" pitchFamily="34" charset="-122"/>
                 <a:cs typeface="Calibri" pitchFamily="34" charset="-120"/>
               </a:rPr>
-              <a:t>Human agreement is fair (α ≈ 0.3–0.45); the v2.5 human review has not started; reported numbers for v2.5 are the v2.4-corpus store rescored on the 560-q set until batch 35 lands.</a:t>
+              <a:t>Human agreement is fair (α ≈ 0.3–0.45); the v2.5 human review has not started; the 560-q table uses the v2.4-corpus store; the partial v2.5-corpus rerun (36 chains) agrees with it within noise.</a:t>
             </a:r>
             <a:endParaRPr lang="en-US" sz="1250" dirty="0"/>
           </a:p>
@@ -18637,7 +18637,7 @@
                 <a:ea typeface="Calibri" pitchFamily="34" charset="-122"/>
                 <a:cs typeface="Calibri" pitchFamily="34" charset="-120"/>
               </a:rPr>
-              <a:t>Hand the reviewer-v25 link to a human reviewer (149 items, ~1.5–2 min each); compute agreement against the machine review.</a:t>
+              <a:t>Author review of v2.5 on the author-v25 link (149 items, ~1.5–2 min each); compute agreement against the machine review.</a:t>
             </a:r>
             <a:endParaRPr lang="en-US" sz="1250" dirty="0"/>
           </a:p>
@@ -18658,7 +18658,7 @@
                 <a:ea typeface="Calibri" pitchFamily="34" charset="-122"/>
                 <a:cs typeface="Calibri" pitchFamily="34" charset="-120"/>
               </a:rPr>
-              <a:t>Finish batch 35: new store on v2.5 and all arms on 560 q; replace the headline with the single-run v2.5 numbers.</a:t>
+              <a:t>Full v2.5-corpus rerun of all arms deferred until the human review settles the corpus; competing systems are being rerun on the same v2.5 sample (15 chains / 58 q).</a:t>
             </a:r>
             <a:endParaRPr lang="en-US" sz="1250" dirty="0"/>
           </a:p>
@@ -20220,7 +20220,7 @@
                 <a:ea typeface="Calibri" pitchFamily="34" charset="-122"/>
                 <a:cs typeface="Calibri" pitchFamily="34" charset="-120"/>
               </a:rPr>
-              <a:t>Human review link for v2.5 is ready; corpus-level rerun of all arms on v2.5 is in progress (batch 35).</a:t>
+              <a:t>Partial rerun on the v2.5 corpus with a new store (batch 35: 36 chains / 140 q): QVF 90.7 vs direct 49.3 (+41.4); paired against the v2.4 store on the same questions the differences are within noise — cleaning does not move the headline. Human review link for v2.5 is ready.</a:t>
             </a:r>
             <a:endParaRPr lang="en-US" sz="1400" dirty="0"/>
           </a:p>

--- a/results/weekly_report_20260904.pptx
+++ b/results/weekly_report_20260904.pptx
@@ -7434,7 +7434,7 @@
                 <a:ea typeface="Calibri" pitchFamily="34" charset="-122"/>
                 <a:cs typeface="Calibri" pitchFamily="34" charset="-120"/>
               </a:rPr>
-              <a:t>Write-side upgrade: a Sonnet-built store reaches 133/133 gold rows but only 92.9 / 92.1; on the 29 chains without slot-name fragmentation it ties full context (97.4 vs 98.2, p = 1.0). Residual errors sit in multi-value political-position chains. StateMemBench (2608.19652, §3.2) reports the same pattern: 44.4% of failures under oracle retrieval are stale-state answers.</a:t>
+              <a:t>Write-side fixes, step by step: Sonnet-built cards 133/133 gold rows but 92.9 / 92.1 (haiku / Sonnet); slot canonicalisation alone 88.6 / 91.4; adding a rule-based assertion-type filter (drop plans, nominations, one-off tasks, restatements; 203 of 1,639 cards, zero gold rows lost) gives 93.6 / 95.0 — gap to full context now −2.1 (p = 0.51). The last 3 questions are one chain whose extraction missed 28 cards. StateMemBench (2608.19652, §3.2) reports the same pattern: 44.4% of failures under oracle retrieval are stale-state answers.</a:t>
             </a:r>
             <a:endParaRPr lang="en-US" sz="1150" dirty="0"/>
           </a:p>
@@ -19598,7 +19598,7 @@
                 <a:gridCol w="1737360"/>
                 <a:gridCol w="1005840"/>
               </a:tblGrid>
-              <a:tr h="438912">
+              <a:tr h="384048">
                 <a:tc>
                   <a:txBody>
                     <a:bodyPr/>
@@ -19608,7 +19608,7 @@
                         <a:buNone/>
                       </a:pPr>
                       <a:r>
-                        <a:rPr lang="en-US" sz="1050" b="1" dirty="0">
+                        <a:rPr lang="en-US" sz="1000" b="1" dirty="0">
                           <a:solidFill>
                             <a:srgbClr val="FFFFFF"/>
                           </a:solidFill>
@@ -19618,7 +19618,7 @@
                         </a:rPr>
                         <a:t>Arm</a:t>
                       </a:r>
-                      <a:endParaRPr lang="en-US" sz="1050" dirty="0">
+                      <a:endParaRPr lang="en-US" sz="1000" dirty="0">
                         <a:latin typeface="Calibri" charset="0"/>
                         <a:ea typeface="Calibri" charset="0"/>
                         <a:cs typeface="Calibri" charset="0"/>
@@ -19676,7 +19676,7 @@
                         <a:buNone/>
                       </a:pPr>
                       <a:r>
-                        <a:rPr lang="en-US" sz="1050" b="1" dirty="0">
+                        <a:rPr lang="en-US" sz="1000" b="1" dirty="0">
                           <a:solidFill>
                             <a:srgbClr val="FFFFFF"/>
                           </a:solidFill>
@@ -19686,7 +19686,7 @@
                         </a:rPr>
                         <a:t>haiku-4.5</a:t>
                       </a:r>
-                      <a:endParaRPr lang="en-US" sz="1050" dirty="0">
+                      <a:endParaRPr lang="en-US" sz="1000" dirty="0">
                         <a:latin typeface="Calibri" charset="0"/>
                         <a:ea typeface="Calibri" charset="0"/>
                         <a:cs typeface="Calibri" charset="0"/>
@@ -19744,7 +19744,7 @@
                         <a:buNone/>
                       </a:pPr>
                       <a:r>
-                        <a:rPr lang="en-US" sz="1050" b="1" dirty="0">
+                        <a:rPr lang="en-US" sz="1000" b="1" dirty="0">
                           <a:solidFill>
                             <a:srgbClr val="FFFFFF"/>
                           </a:solidFill>
@@ -19754,7 +19754,7 @@
                         </a:rPr>
                         <a:t>Sonnet 5</a:t>
                       </a:r>
-                      <a:endParaRPr lang="en-US" sz="1050" dirty="0">
+                      <a:endParaRPr lang="en-US" sz="1000" dirty="0">
                         <a:latin typeface="Calibri" charset="0"/>
                         <a:ea typeface="Calibri" charset="0"/>
                         <a:cs typeface="Calibri" charset="0"/>
@@ -19812,7 +19812,7 @@
                         <a:buNone/>
                       </a:pPr>
                       <a:r>
-                        <a:rPr lang="en-US" sz="1050" b="1" dirty="0">
+                        <a:rPr lang="en-US" sz="1000" b="1" dirty="0">
                           <a:solidFill>
                             <a:srgbClr val="FFFFFF"/>
                           </a:solidFill>
@@ -19822,7 +19822,7 @@
                         </a:rPr>
                         <a:t>In tok / q (haiku / Sonnet)</a:t>
                       </a:r>
-                      <a:endParaRPr lang="en-US" sz="1050" dirty="0">
+                      <a:endParaRPr lang="en-US" sz="1000" dirty="0">
                         <a:latin typeface="Calibri" charset="0"/>
                         <a:ea typeface="Calibri" charset="0"/>
                         <a:cs typeface="Calibri" charset="0"/>
@@ -19880,7 +19880,7 @@
                         <a:buNone/>
                       </a:pPr>
                       <a:r>
-                        <a:rPr lang="en-US" sz="1050" b="1" dirty="0">
+                        <a:rPr lang="en-US" sz="1000" b="1" dirty="0">
                           <a:solidFill>
                             <a:srgbClr val="FFFFFF"/>
                           </a:solidFill>
@@ -19890,7 +19890,7 @@
                         </a:rPr>
                         <a:t>$ / q (Sonnet)</a:t>
                       </a:r>
-                      <a:endParaRPr lang="en-US" sz="1050" dirty="0">
+                      <a:endParaRPr lang="en-US" sz="1000" dirty="0">
                         <a:latin typeface="Calibri" charset="0"/>
                         <a:ea typeface="Calibri" charset="0"/>
                         <a:cs typeface="Calibri" charset="0"/>
@@ -19940,7 +19940,7 @@
                   </a:tcPr>
                 </a:tc>
               </a:tr>
-              <a:tr h="438912">
+              <a:tr h="384048">
                 <a:tc>
                   <a:txBody>
                     <a:bodyPr/>
@@ -19950,7 +19950,7 @@
                         <a:buNone/>
                       </a:pPr>
                       <a:r>
-                        <a:rPr lang="en-US" sz="1050" dirty="0">
+                        <a:rPr lang="en-US" sz="1000" dirty="0">
                           <a:solidFill>
                             <a:srgbClr val="1F2937"/>
                           </a:solidFill>
@@ -19960,7 +19960,7 @@
                         </a:rPr>
                         <a:t>Whole memory in prompt, plain call</a:t>
                       </a:r>
-                      <a:endParaRPr lang="en-US" sz="1050" dirty="0">
+                      <a:endParaRPr lang="en-US" sz="1000" dirty="0">
                         <a:latin typeface="Calibri" charset="0"/>
                         <a:ea typeface="Calibri" charset="0"/>
                         <a:cs typeface="Calibri" charset="0"/>
@@ -20018,7 +20018,7 @@
                         <a:buNone/>
                       </a:pPr>
                       <a:r>
-                        <a:rPr lang="en-US" sz="1050" dirty="0">
+                        <a:rPr lang="en-US" sz="1000" dirty="0">
                           <a:solidFill>
                             <a:srgbClr val="1F2937"/>
                           </a:solidFill>
@@ -20028,7 +20028,7 @@
                         </a:rPr>
                         <a:t>70.0</a:t>
                       </a:r>
-                      <a:endParaRPr lang="en-US" sz="1050" dirty="0">
+                      <a:endParaRPr lang="en-US" sz="1000" dirty="0">
                         <a:latin typeface="Calibri" charset="0"/>
                         <a:ea typeface="Calibri" charset="0"/>
                         <a:cs typeface="Calibri" charset="0"/>
@@ -20086,7 +20086,7 @@
                         <a:buNone/>
                       </a:pPr>
                       <a:r>
-                        <a:rPr lang="en-US" sz="1050" dirty="0">
+                        <a:rPr lang="en-US" sz="1000" dirty="0">
                           <a:solidFill>
                             <a:srgbClr val="1F2937"/>
                           </a:solidFill>
@@ -20096,7 +20096,7 @@
                         </a:rPr>
                         <a:t>97.1 (max_tokens 4000; 87.9 at 800 because thinking shares the cap)</a:t>
                       </a:r>
-                      <a:endParaRPr lang="en-US" sz="1050" dirty="0">
+                      <a:endParaRPr lang="en-US" sz="1000" dirty="0">
                         <a:latin typeface="Calibri" charset="0"/>
                         <a:ea typeface="Calibri" charset="0"/>
                         <a:cs typeface="Calibri" charset="0"/>
@@ -20154,7 +20154,7 @@
                         <a:buNone/>
                       </a:pPr>
                       <a:r>
-                        <a:rPr lang="en-US" sz="1050" dirty="0">
+                        <a:rPr lang="en-US" sz="1000" dirty="0">
                           <a:solidFill>
                             <a:srgbClr val="1F2937"/>
                           </a:solidFill>
@@ -20164,7 +20164,7 @@
                         </a:rPr>
                         <a:t>13.6K / 18.5K</a:t>
                       </a:r>
-                      <a:endParaRPr lang="en-US" sz="1050" dirty="0">
+                      <a:endParaRPr lang="en-US" sz="1000" dirty="0">
                         <a:latin typeface="Calibri" charset="0"/>
                         <a:ea typeface="Calibri" charset="0"/>
                         <a:cs typeface="Calibri" charset="0"/>
@@ -20222,7 +20222,7 @@
                         <a:buNone/>
                       </a:pPr>
                       <a:r>
-                        <a:rPr lang="en-US" sz="1050" dirty="0">
+                        <a:rPr lang="en-US" sz="1000" dirty="0">
                           <a:solidFill>
                             <a:srgbClr val="1F2937"/>
                           </a:solidFill>
@@ -20232,7 +20232,7 @@
                         </a:rPr>
                         <a:t>$0.042</a:t>
                       </a:r>
-                      <a:endParaRPr lang="en-US" sz="1050" dirty="0">
+                      <a:endParaRPr lang="en-US" sz="1000" dirty="0">
                         <a:latin typeface="Calibri" charset="0"/>
                         <a:ea typeface="Calibri" charset="0"/>
                         <a:cs typeface="Calibri" charset="0"/>
@@ -20282,7 +20282,7 @@
                   </a:tcPr>
                 </a:tc>
               </a:tr>
-              <a:tr h="438912">
+              <a:tr h="384048">
                 <a:tc>
                   <a:txBody>
                     <a:bodyPr/>
@@ -20292,7 +20292,7 @@
                         <a:buNone/>
                       </a:pPr>
                       <a:r>
-                        <a:rPr lang="en-US" sz="1050" dirty="0">
+                        <a:rPr lang="en-US" sz="1000" dirty="0">
                           <a:solidFill>
                             <a:srgbClr val="1F2937"/>
                           </a:solidFill>
@@ -20302,7 +20302,7 @@
                         </a:rPr>
                         <a:t>Archived plain full text (other user-prompt wording, same bytes)</a:t>
                       </a:r>
-                      <a:endParaRPr lang="en-US" sz="1050" dirty="0">
+                      <a:endParaRPr lang="en-US" sz="1000" dirty="0">
                         <a:latin typeface="Calibri" charset="0"/>
                         <a:ea typeface="Calibri" charset="0"/>
                         <a:cs typeface="Calibri" charset="0"/>
@@ -20360,7 +20360,7 @@
                         <a:buNone/>
                       </a:pPr>
                       <a:r>
-                        <a:rPr lang="en-US" sz="1050" dirty="0">
+                        <a:rPr lang="en-US" sz="1000" dirty="0">
                           <a:solidFill>
                             <a:srgbClr val="1F2937"/>
                           </a:solidFill>
@@ -20370,7 +20370,7 @@
                         </a:rPr>
                         <a:t>58.6</a:t>
                       </a:r>
-                      <a:endParaRPr lang="en-US" sz="1050" dirty="0">
+                      <a:endParaRPr lang="en-US" sz="1000" dirty="0">
                         <a:latin typeface="Calibri" charset="0"/>
                         <a:ea typeface="Calibri" charset="0"/>
                         <a:cs typeface="Calibri" charset="0"/>
@@ -20428,7 +20428,7 @@
                         <a:buNone/>
                       </a:pPr>
                       <a:r>
-                        <a:rPr lang="en-US" sz="1050" dirty="0">
+                        <a:rPr lang="en-US" sz="1000" dirty="0">
                           <a:solidFill>
                             <a:srgbClr val="1F2937"/>
                           </a:solidFill>
@@ -20438,7 +20438,7 @@
                         </a:rPr>
                         <a:t>84.8</a:t>
                       </a:r>
-                      <a:endParaRPr lang="en-US" sz="1050" dirty="0">
+                      <a:endParaRPr lang="en-US" sz="1000" dirty="0">
                         <a:latin typeface="Calibri" charset="0"/>
                         <a:ea typeface="Calibri" charset="0"/>
                         <a:cs typeface="Calibri" charset="0"/>
@@ -20496,7 +20496,7 @@
                         <a:buNone/>
                       </a:pPr>
                       <a:r>
-                        <a:rPr lang="en-US" sz="1050" dirty="0">
+                        <a:rPr lang="en-US" sz="1000" dirty="0">
                           <a:solidFill>
                             <a:srgbClr val="1F2937"/>
                           </a:solidFill>
@@ -20506,7 +20506,7 @@
                         </a:rPr>
                         <a:t>13.6K / 18.6K</a:t>
                       </a:r>
-                      <a:endParaRPr lang="en-US" sz="1050" dirty="0">
+                      <a:endParaRPr lang="en-US" sz="1000" dirty="0">
                         <a:latin typeface="Calibri" charset="0"/>
                         <a:ea typeface="Calibri" charset="0"/>
                         <a:cs typeface="Calibri" charset="0"/>
@@ -20564,7 +20564,7 @@
                         <a:buNone/>
                       </a:pPr>
                       <a:r>
-                        <a:rPr lang="en-US" sz="1050" dirty="0">
+                        <a:rPr lang="en-US" sz="1000" dirty="0">
                           <a:solidFill>
                             <a:srgbClr val="1F2937"/>
                           </a:solidFill>
@@ -20574,7 +20574,7 @@
                         </a:rPr>
                         <a:t>$0.039</a:t>
                       </a:r>
-                      <a:endParaRPr lang="en-US" sz="1050" dirty="0">
+                      <a:endParaRPr lang="en-US" sz="1000" dirty="0">
                         <a:latin typeface="Calibri" charset="0"/>
                         <a:ea typeface="Calibri" charset="0"/>
                         <a:cs typeface="Calibri" charset="0"/>
@@ -20624,7 +20624,7 @@
                   </a:tcPr>
                 </a:tc>
               </a:tr>
-              <a:tr h="438912">
+              <a:tr h="384048">
                 <a:tc>
                   <a:txBody>
                     <a:bodyPr/>
@@ -20634,7 +20634,7 @@
                         <a:buNone/>
                       </a:pPr>
                       <a:r>
-                        <a:rPr lang="en-US" sz="1050" dirty="0">
+                        <a:rPr lang="en-US" sz="1000" dirty="0">
                           <a:solidFill>
                             <a:srgbClr val="1F2937"/>
                           </a:solidFill>
@@ -20644,7 +20644,7 @@
                         </a:rPr>
                         <a:t>Full text + trajectory protocol</a:t>
                       </a:r>
-                      <a:endParaRPr lang="en-US" sz="1050" dirty="0">
+                      <a:endParaRPr lang="en-US" sz="1000" dirty="0">
                         <a:latin typeface="Calibri" charset="0"/>
                         <a:ea typeface="Calibri" charset="0"/>
                         <a:cs typeface="Calibri" charset="0"/>
@@ -20702,7 +20702,7 @@
                         <a:buNone/>
                       </a:pPr>
                       <a:r>
-                        <a:rPr lang="en-US" sz="1050" dirty="0">
+                        <a:rPr lang="en-US" sz="1000" dirty="0">
                           <a:solidFill>
                             <a:srgbClr val="1F2937"/>
                           </a:solidFill>
@@ -20712,7 +20712,7 @@
                         </a:rPr>
                         <a:t>92.9</a:t>
                       </a:r>
-                      <a:endParaRPr lang="en-US" sz="1050" dirty="0">
+                      <a:endParaRPr lang="en-US" sz="1000" dirty="0">
                         <a:latin typeface="Calibri" charset="0"/>
                         <a:ea typeface="Calibri" charset="0"/>
                         <a:cs typeface="Calibri" charset="0"/>
@@ -20770,7 +20770,7 @@
                         <a:buNone/>
                       </a:pPr>
                       <a:r>
-                        <a:rPr lang="en-US" sz="1050" dirty="0">
+                        <a:rPr lang="en-US" sz="1000" dirty="0">
                           <a:solidFill>
                             <a:srgbClr val="1F2937"/>
                           </a:solidFill>
@@ -20780,7 +20780,7 @@
                         </a:rPr>
                         <a:t>—</a:t>
                       </a:r>
-                      <a:endParaRPr lang="en-US" sz="1050" dirty="0">
+                      <a:endParaRPr lang="en-US" sz="1000" dirty="0">
                         <a:latin typeface="Calibri" charset="0"/>
                         <a:ea typeface="Calibri" charset="0"/>
                         <a:cs typeface="Calibri" charset="0"/>
@@ -20838,7 +20838,7 @@
                         <a:buNone/>
                       </a:pPr>
                       <a:r>
-                        <a:rPr lang="en-US" sz="1050" dirty="0">
+                        <a:rPr lang="en-US" sz="1000" dirty="0">
                           <a:solidFill>
                             <a:srgbClr val="1F2937"/>
                           </a:solidFill>
@@ -20848,7 +20848,7 @@
                         </a:rPr>
                         <a:t>13.8K</a:t>
                       </a:r>
-                      <a:endParaRPr lang="en-US" sz="1050" dirty="0">
+                      <a:endParaRPr lang="en-US" sz="1000" dirty="0">
                         <a:latin typeface="Calibri" charset="0"/>
                         <a:ea typeface="Calibri" charset="0"/>
                         <a:cs typeface="Calibri" charset="0"/>
@@ -20906,7 +20906,7 @@
                         <a:buNone/>
                       </a:pPr>
                       <a:r>
-                        <a:rPr lang="en-US" sz="1050" dirty="0">
+                        <a:rPr lang="en-US" sz="1000" dirty="0">
                           <a:solidFill>
                             <a:srgbClr val="1F2937"/>
                           </a:solidFill>
@@ -20916,7 +20916,7 @@
                         </a:rPr>
                         <a:t>—</a:t>
                       </a:r>
-                      <a:endParaRPr lang="en-US" sz="1050" dirty="0">
+                      <a:endParaRPr lang="en-US" sz="1000" dirty="0">
                         <a:latin typeface="Calibri" charset="0"/>
                         <a:ea typeface="Calibri" charset="0"/>
                         <a:cs typeface="Calibri" charset="0"/>
@@ -20966,7 +20966,7 @@
                   </a:tcPr>
                 </a:tc>
               </a:tr>
-              <a:tr h="438912">
+              <a:tr h="384048">
                 <a:tc>
                   <a:txBody>
                     <a:bodyPr/>
@@ -20976,7 +20976,7 @@
                         <a:buNone/>
                       </a:pPr>
                       <a:r>
-                        <a:rPr lang="en-US" sz="1050" dirty="0">
+                        <a:rPr lang="en-US" sz="1000" dirty="0">
                           <a:solidFill>
                             <a:srgbClr val="1F2937"/>
                           </a:solidFill>
@@ -20986,7 +20986,7 @@
                         </a:rPr>
                         <a:t>Top-10 retrieval (direct)</a:t>
                       </a:r>
-                      <a:endParaRPr lang="en-US" sz="1050" dirty="0">
+                      <a:endParaRPr lang="en-US" sz="1000" dirty="0">
                         <a:latin typeface="Calibri" charset="0"/>
                         <a:ea typeface="Calibri" charset="0"/>
                         <a:cs typeface="Calibri" charset="0"/>
@@ -21044,7 +21044,7 @@
                         <a:buNone/>
                       </a:pPr>
                       <a:r>
-                        <a:rPr lang="en-US" sz="1050" dirty="0">
+                        <a:rPr lang="en-US" sz="1000" dirty="0">
                           <a:solidFill>
                             <a:srgbClr val="1F2937"/>
                           </a:solidFill>
@@ -21054,7 +21054,7 @@
                         </a:rPr>
                         <a:t>50.7</a:t>
                       </a:r>
-                      <a:endParaRPr lang="en-US" sz="1050" dirty="0">
+                      <a:endParaRPr lang="en-US" sz="1000" dirty="0">
                         <a:latin typeface="Calibri" charset="0"/>
                         <a:ea typeface="Calibri" charset="0"/>
                         <a:cs typeface="Calibri" charset="0"/>
@@ -21112,7 +21112,7 @@
                         <a:buNone/>
                       </a:pPr>
                       <a:r>
-                        <a:rPr lang="en-US" sz="1050" dirty="0">
+                        <a:rPr lang="en-US" sz="1000" dirty="0">
                           <a:solidFill>
                             <a:srgbClr val="1F2937"/>
                           </a:solidFill>
@@ -21122,7 +21122,7 @@
                         </a:rPr>
                         <a:t>70.7</a:t>
                       </a:r>
-                      <a:endParaRPr lang="en-US" sz="1050" dirty="0">
+                      <a:endParaRPr lang="en-US" sz="1000" dirty="0">
                         <a:latin typeface="Calibri" charset="0"/>
                         <a:ea typeface="Calibri" charset="0"/>
                         <a:cs typeface="Calibri" charset="0"/>
@@ -21180,7 +21180,7 @@
                         <a:buNone/>
                       </a:pPr>
                       <a:r>
-                        <a:rPr lang="en-US" sz="1050" dirty="0">
+                        <a:rPr lang="en-US" sz="1000" dirty="0">
                           <a:solidFill>
                             <a:srgbClr val="1F2937"/>
                           </a:solidFill>
@@ -21190,7 +21190,7 @@
                         </a:rPr>
                         <a:t>0.9K / 1.1K</a:t>
                       </a:r>
-                      <a:endParaRPr lang="en-US" sz="1050" dirty="0">
+                      <a:endParaRPr lang="en-US" sz="1000" dirty="0">
                         <a:latin typeface="Calibri" charset="0"/>
                         <a:ea typeface="Calibri" charset="0"/>
                         <a:cs typeface="Calibri" charset="0"/>
@@ -21248,7 +21248,7 @@
                         <a:buNone/>
                       </a:pPr>
                       <a:r>
-                        <a:rPr lang="en-US" sz="1050" dirty="0">
+                        <a:rPr lang="en-US" sz="1000" dirty="0">
                           <a:solidFill>
                             <a:srgbClr val="1F2937"/>
                           </a:solidFill>
@@ -21258,7 +21258,7 @@
                         </a:rPr>
                         <a:t>$0.005</a:t>
                       </a:r>
-                      <a:endParaRPr lang="en-US" sz="1050" dirty="0">
+                      <a:endParaRPr lang="en-US" sz="1000" dirty="0">
                         <a:latin typeface="Calibri" charset="0"/>
                         <a:ea typeface="Calibri" charset="0"/>
                         <a:cs typeface="Calibri" charset="0"/>
@@ -21308,7 +21308,7 @@
                   </a:tcPr>
                 </a:tc>
               </a:tr>
-              <a:tr h="438912">
+              <a:tr h="384048">
                 <a:tc>
                   <a:txBody>
                     <a:bodyPr/>
@@ -21318,7 +21318,7 @@
                         <a:buNone/>
                       </a:pPr>
                       <a:r>
-                        <a:rPr lang="en-US" sz="1050" b="1" dirty="0">
+                        <a:rPr lang="en-US" sz="1000" b="1" dirty="0">
                           <a:solidFill>
                             <a:srgbClr val="1F2937"/>
                           </a:solidFill>
@@ -21328,7 +21328,7 @@
                         </a:rPr>
                         <a:t>QVF ledger (store v45)</a:t>
                       </a:r>
-                      <a:endParaRPr lang="en-US" sz="1050" dirty="0">
+                      <a:endParaRPr lang="en-US" sz="1000" dirty="0">
                         <a:latin typeface="Calibri" charset="0"/>
                         <a:ea typeface="Calibri" charset="0"/>
                         <a:cs typeface="Calibri" charset="0"/>
@@ -21386,7 +21386,7 @@
                         <a:buNone/>
                       </a:pPr>
                       <a:r>
-                        <a:rPr lang="en-US" sz="1050" b="1" dirty="0">
+                        <a:rPr lang="en-US" sz="1000" b="1" dirty="0">
                           <a:solidFill>
                             <a:srgbClr val="1F2937"/>
                           </a:solidFill>
@@ -21396,7 +21396,7 @@
                         </a:rPr>
                         <a:t>91.4</a:t>
                       </a:r>
-                      <a:endParaRPr lang="en-US" sz="1050" dirty="0">
+                      <a:endParaRPr lang="en-US" sz="1000" dirty="0">
                         <a:latin typeface="Calibri" charset="0"/>
                         <a:ea typeface="Calibri" charset="0"/>
                         <a:cs typeface="Calibri" charset="0"/>
@@ -21454,7 +21454,7 @@
                         <a:buNone/>
                       </a:pPr>
                       <a:r>
-                        <a:rPr lang="en-US" sz="1050" b="1" dirty="0">
+                        <a:rPr lang="en-US" sz="1000" b="1" dirty="0">
                           <a:solidFill>
                             <a:srgbClr val="1F2937"/>
                           </a:solidFill>
@@ -21464,7 +21464,7 @@
                         </a:rPr>
                         <a:t>90.7</a:t>
                       </a:r>
-                      <a:endParaRPr lang="en-US" sz="1050" dirty="0">
+                      <a:endParaRPr lang="en-US" sz="1000" dirty="0">
                         <a:latin typeface="Calibri" charset="0"/>
                         <a:ea typeface="Calibri" charset="0"/>
                         <a:cs typeface="Calibri" charset="0"/>
@@ -21522,7 +21522,7 @@
                         <a:buNone/>
                       </a:pPr>
                       <a:r>
-                        <a:rPr lang="en-US" sz="1050" dirty="0">
+                        <a:rPr lang="en-US" sz="1000" dirty="0">
                           <a:solidFill>
                             <a:srgbClr val="1F2937"/>
                           </a:solidFill>
@@ -21532,7 +21532,7 @@
                         </a:rPr>
                         <a:t>2.8K / 3.7K</a:t>
                       </a:r>
-                      <a:endParaRPr lang="en-US" sz="1050" dirty="0">
+                      <a:endParaRPr lang="en-US" sz="1000" dirty="0">
                         <a:latin typeface="Calibri" charset="0"/>
                         <a:ea typeface="Calibri" charset="0"/>
                         <a:cs typeface="Calibri" charset="0"/>
@@ -21590,7 +21590,7 @@
                         <a:buNone/>
                       </a:pPr>
                       <a:r>
-                        <a:rPr lang="en-US" sz="1050" dirty="0">
+                        <a:rPr lang="en-US" sz="1000" dirty="0">
                           <a:solidFill>
                             <a:srgbClr val="1F2937"/>
                           </a:solidFill>
@@ -21600,7 +21600,7 @@
                         </a:rPr>
                         <a:t>$0.015</a:t>
                       </a:r>
-                      <a:endParaRPr lang="en-US" sz="1050" dirty="0">
+                      <a:endParaRPr lang="en-US" sz="1000" dirty="0">
                         <a:latin typeface="Calibri" charset="0"/>
                         <a:ea typeface="Calibri" charset="0"/>
                         <a:cs typeface="Calibri" charset="0"/>
@@ -21650,7 +21650,7 @@
                   </a:tcPr>
                 </a:tc>
               </a:tr>
-              <a:tr h="438912">
+              <a:tr h="384048">
                 <a:tc>
                   <a:txBody>
                     <a:bodyPr/>
@@ -21660,7 +21660,7 @@
                         <a:buNone/>
                       </a:pPr>
                       <a:r>
-                        <a:rPr lang="en-US" sz="1050" dirty="0">
+                        <a:rPr lang="en-US" sz="1000" dirty="0">
                           <a:solidFill>
                             <a:srgbClr val="1F2937"/>
                           </a:solidFill>
@@ -21670,7 +21670,7 @@
                         </a:rPr>
                         <a:t>QVF ledger, Sonnet-built cards (v47s)</a:t>
                       </a:r>
-                      <a:endParaRPr lang="en-US" sz="1050" dirty="0">
+                      <a:endParaRPr lang="en-US" sz="1000" dirty="0">
                         <a:latin typeface="Calibri" charset="0"/>
                         <a:ea typeface="Calibri" charset="0"/>
                         <a:cs typeface="Calibri" charset="0"/>
@@ -21728,7 +21728,7 @@
                         <a:buNone/>
                       </a:pPr>
                       <a:r>
-                        <a:rPr lang="en-US" sz="1050" dirty="0">
+                        <a:rPr lang="en-US" sz="1000" dirty="0">
                           <a:solidFill>
                             <a:srgbClr val="1F2937"/>
                           </a:solidFill>
@@ -21738,7 +21738,7 @@
                         </a:rPr>
                         <a:t>92.9</a:t>
                       </a:r>
-                      <a:endParaRPr lang="en-US" sz="1050" dirty="0">
+                      <a:endParaRPr lang="en-US" sz="1000" dirty="0">
                         <a:latin typeface="Calibri" charset="0"/>
                         <a:ea typeface="Calibri" charset="0"/>
                         <a:cs typeface="Calibri" charset="0"/>
@@ -21796,7 +21796,7 @@
                         <a:buNone/>
                       </a:pPr>
                       <a:r>
-                        <a:rPr lang="en-US" sz="1050" dirty="0">
+                        <a:rPr lang="en-US" sz="1000" dirty="0">
                           <a:solidFill>
                             <a:srgbClr val="1F2937"/>
                           </a:solidFill>
@@ -21806,7 +21806,7 @@
                         </a:rPr>
                         <a:t>92.1</a:t>
                       </a:r>
-                      <a:endParaRPr lang="en-US" sz="1050" dirty="0">
+                      <a:endParaRPr lang="en-US" sz="1000" dirty="0">
                         <a:latin typeface="Calibri" charset="0"/>
                         <a:ea typeface="Calibri" charset="0"/>
                         <a:cs typeface="Calibri" charset="0"/>
@@ -21864,7 +21864,7 @@
                         <a:buNone/>
                       </a:pPr>
                       <a:r>
-                        <a:rPr lang="en-US" sz="1050" dirty="0">
+                        <a:rPr lang="en-US" sz="1000" dirty="0">
                           <a:solidFill>
                             <a:srgbClr val="1F2937"/>
                           </a:solidFill>
@@ -21874,7 +21874,7 @@
                         </a:rPr>
                         <a:t>2.6K / 3.5K</a:t>
                       </a:r>
-                      <a:endParaRPr lang="en-US" sz="1050" dirty="0">
+                      <a:endParaRPr lang="en-US" sz="1000" dirty="0">
                         <a:latin typeface="Calibri" charset="0"/>
                         <a:ea typeface="Calibri" charset="0"/>
                         <a:cs typeface="Calibri" charset="0"/>
@@ -21932,7 +21932,7 @@
                         <a:buNone/>
                       </a:pPr>
                       <a:r>
-                        <a:rPr lang="en-US" sz="1050" dirty="0">
+                        <a:rPr lang="en-US" sz="1000" dirty="0">
                           <a:solidFill>
                             <a:srgbClr val="1F2937"/>
                           </a:solidFill>
@@ -21942,7 +21942,7 @@
                         </a:rPr>
                         <a:t>$0.015</a:t>
                       </a:r>
-                      <a:endParaRPr lang="en-US" sz="1050" dirty="0">
+                      <a:endParaRPr lang="en-US" sz="1000" dirty="0">
                         <a:latin typeface="Calibri" charset="0"/>
                         <a:ea typeface="Calibri" charset="0"/>
                         <a:cs typeface="Calibri" charset="0"/>
@@ -21988,6 +21988,348 @@
                     </a:lnB>
                     <a:solidFill>
                       <a:srgbClr val="F5F7FA"/>
+                    </a:solidFill>
+                  </a:tcPr>
+                </a:tc>
+              </a:tr>
+              <a:tr h="384048">
+                <a:tc>
+                  <a:txBody>
+                    <a:bodyPr/>
+                    <a:lstStyle/>
+                    <a:p>
+                      <a:pPr algn="l" indent="0" marL="0">
+                        <a:buNone/>
+                      </a:pPr>
+                      <a:r>
+                        <a:rPr lang="en-US" sz="1000" b="1" dirty="0">
+                          <a:solidFill>
+                            <a:srgbClr val="1F2937"/>
+                          </a:solidFill>
+                          <a:latin typeface="Calibri" pitchFamily="34" charset="0"/>
+                          <a:ea typeface="Calibri" pitchFamily="34" charset="-122"/>
+                          <a:cs typeface="Calibri" pitchFamily="34" charset="-120"/>
+                        </a:rPr>
+                        <a:t>QVF ledger, Sonnet-built + assertion-type filter (v47skf)</a:t>
+                      </a:r>
+                      <a:endParaRPr lang="en-US" sz="1000" dirty="0">
+                        <a:latin typeface="Calibri" charset="0"/>
+                        <a:ea typeface="Calibri" charset="0"/>
+                        <a:cs typeface="Calibri" charset="0"/>
+                      </a:endParaRPr>
+                    </a:p>
+                  </a:txBody>
+                  <a:tcPr marL="36576" marR="36576" marT="36576" marB="36576" anchor="ctr">
+                    <a:lnL w="6350" cap="flat" cmpd="sng" algn="ctr">
+                      <a:solidFill>
+                        <a:srgbClr val="D1D5DB"/>
+                      </a:solidFill>
+                      <a:prstDash val="solid"/>
+                      <a:round/>
+                      <a:headEnd type="none" w="med" len="med"/>
+                      <a:tailEnd type="none" w="med" len="med"/>
+                    </a:lnL>
+                    <a:lnR w="6350" cap="flat" cmpd="sng" algn="ctr">
+                      <a:solidFill>
+                        <a:srgbClr val="D1D5DB"/>
+                      </a:solidFill>
+                      <a:prstDash val="solid"/>
+                      <a:round/>
+                      <a:headEnd type="none" w="med" len="med"/>
+                      <a:tailEnd type="none" w="med" len="med"/>
+                    </a:lnR>
+                    <a:lnT w="6350" cap="flat" cmpd="sng" algn="ctr">
+                      <a:solidFill>
+                        <a:srgbClr val="D1D5DB"/>
+                      </a:solidFill>
+                      <a:prstDash val="solid"/>
+                      <a:round/>
+                      <a:headEnd type="none" w="med" len="med"/>
+                      <a:tailEnd type="none" w="med" len="med"/>
+                    </a:lnT>
+                    <a:lnB w="6350" cap="flat" cmpd="sng" algn="ctr">
+                      <a:solidFill>
+                        <a:srgbClr val="D1D5DB"/>
+                      </a:solidFill>
+                      <a:prstDash val="solid"/>
+                      <a:round/>
+                      <a:headEnd type="none" w="med" len="med"/>
+                      <a:tailEnd type="none" w="med" len="med"/>
+                    </a:lnB>
+                    <a:solidFill>
+                      <a:srgbClr val="FFFFFF"/>
+                    </a:solidFill>
+                  </a:tcPr>
+                </a:tc>
+                <a:tc>
+                  <a:txBody>
+                    <a:bodyPr/>
+                    <a:lstStyle/>
+                    <a:p>
+                      <a:pPr algn="ctr" indent="0" marL="0">
+                        <a:buNone/>
+                      </a:pPr>
+                      <a:r>
+                        <a:rPr lang="en-US" sz="1000" b="1" dirty="0">
+                          <a:solidFill>
+                            <a:srgbClr val="1F2937"/>
+                          </a:solidFill>
+                          <a:latin typeface="Calibri" pitchFamily="34" charset="0"/>
+                          <a:ea typeface="Calibri" pitchFamily="34" charset="-122"/>
+                          <a:cs typeface="Calibri" pitchFamily="34" charset="-120"/>
+                        </a:rPr>
+                        <a:t>93.6</a:t>
+                      </a:r>
+                      <a:endParaRPr lang="en-US" sz="1000" dirty="0">
+                        <a:latin typeface="Calibri" charset="0"/>
+                        <a:ea typeface="Calibri" charset="0"/>
+                        <a:cs typeface="Calibri" charset="0"/>
+                      </a:endParaRPr>
+                    </a:p>
+                  </a:txBody>
+                  <a:tcPr marL="36576" marR="36576" marT="36576" marB="36576" anchor="ctr">
+                    <a:lnL w="6350" cap="flat" cmpd="sng" algn="ctr">
+                      <a:solidFill>
+                        <a:srgbClr val="D1D5DB"/>
+                      </a:solidFill>
+                      <a:prstDash val="solid"/>
+                      <a:round/>
+                      <a:headEnd type="none" w="med" len="med"/>
+                      <a:tailEnd type="none" w="med" len="med"/>
+                    </a:lnL>
+                    <a:lnR w="6350" cap="flat" cmpd="sng" algn="ctr">
+                      <a:solidFill>
+                        <a:srgbClr val="D1D5DB"/>
+                      </a:solidFill>
+                      <a:prstDash val="solid"/>
+                      <a:round/>
+                      <a:headEnd type="none" w="med" len="med"/>
+                      <a:tailEnd type="none" w="med" len="med"/>
+                    </a:lnR>
+                    <a:lnT w="6350" cap="flat" cmpd="sng" algn="ctr">
+                      <a:solidFill>
+                        <a:srgbClr val="D1D5DB"/>
+                      </a:solidFill>
+                      <a:prstDash val="solid"/>
+                      <a:round/>
+                      <a:headEnd type="none" w="med" len="med"/>
+                      <a:tailEnd type="none" w="med" len="med"/>
+                    </a:lnT>
+                    <a:lnB w="6350" cap="flat" cmpd="sng" algn="ctr">
+                      <a:solidFill>
+                        <a:srgbClr val="D1D5DB"/>
+                      </a:solidFill>
+                      <a:prstDash val="solid"/>
+                      <a:round/>
+                      <a:headEnd type="none" w="med" len="med"/>
+                      <a:tailEnd type="none" w="med" len="med"/>
+                    </a:lnB>
+                    <a:solidFill>
+                      <a:srgbClr val="FFFFFF"/>
+                    </a:solidFill>
+                  </a:tcPr>
+                </a:tc>
+                <a:tc>
+                  <a:txBody>
+                    <a:bodyPr/>
+                    <a:lstStyle/>
+                    <a:p>
+                      <a:pPr algn="ctr" indent="0" marL="0">
+                        <a:buNone/>
+                      </a:pPr>
+                      <a:r>
+                        <a:rPr lang="en-US" sz="1000" b="1" dirty="0">
+                          <a:solidFill>
+                            <a:srgbClr val="1F2937"/>
+                          </a:solidFill>
+                          <a:latin typeface="Calibri" pitchFamily="34" charset="0"/>
+                          <a:ea typeface="Calibri" pitchFamily="34" charset="-122"/>
+                          <a:cs typeface="Calibri" pitchFamily="34" charset="-120"/>
+                        </a:rPr>
+                        <a:t>95.0</a:t>
+                      </a:r>
+                      <a:endParaRPr lang="en-US" sz="1000" dirty="0">
+                        <a:latin typeface="Calibri" charset="0"/>
+                        <a:ea typeface="Calibri" charset="0"/>
+                        <a:cs typeface="Calibri" charset="0"/>
+                      </a:endParaRPr>
+                    </a:p>
+                  </a:txBody>
+                  <a:tcPr marL="36576" marR="36576" marT="36576" marB="36576" anchor="ctr">
+                    <a:lnL w="6350" cap="flat" cmpd="sng" algn="ctr">
+                      <a:solidFill>
+                        <a:srgbClr val="D1D5DB"/>
+                      </a:solidFill>
+                      <a:prstDash val="solid"/>
+                      <a:round/>
+                      <a:headEnd type="none" w="med" len="med"/>
+                      <a:tailEnd type="none" w="med" len="med"/>
+                    </a:lnL>
+                    <a:lnR w="6350" cap="flat" cmpd="sng" algn="ctr">
+                      <a:solidFill>
+                        <a:srgbClr val="D1D5DB"/>
+                      </a:solidFill>
+                      <a:prstDash val="solid"/>
+                      <a:round/>
+                      <a:headEnd type="none" w="med" len="med"/>
+                      <a:tailEnd type="none" w="med" len="med"/>
+                    </a:lnR>
+                    <a:lnT w="6350" cap="flat" cmpd="sng" algn="ctr">
+                      <a:solidFill>
+                        <a:srgbClr val="D1D5DB"/>
+                      </a:solidFill>
+                      <a:prstDash val="solid"/>
+                      <a:round/>
+                      <a:headEnd type="none" w="med" len="med"/>
+                      <a:tailEnd type="none" w="med" len="med"/>
+                    </a:lnT>
+                    <a:lnB w="6350" cap="flat" cmpd="sng" algn="ctr">
+                      <a:solidFill>
+                        <a:srgbClr val="D1D5DB"/>
+                      </a:solidFill>
+                      <a:prstDash val="solid"/>
+                      <a:round/>
+                      <a:headEnd type="none" w="med" len="med"/>
+                      <a:tailEnd type="none" w="med" len="med"/>
+                    </a:lnB>
+                    <a:solidFill>
+                      <a:srgbClr val="FFFFFF"/>
+                    </a:solidFill>
+                  </a:tcPr>
+                </a:tc>
+                <a:tc>
+                  <a:txBody>
+                    <a:bodyPr/>
+                    <a:lstStyle/>
+                    <a:p>
+                      <a:pPr algn="ctr" indent="0" marL="0">
+                        <a:buNone/>
+                      </a:pPr>
+                      <a:r>
+                        <a:rPr lang="en-US" sz="1000" dirty="0">
+                          <a:solidFill>
+                            <a:srgbClr val="1F2937"/>
+                          </a:solidFill>
+                          <a:latin typeface="Calibri" pitchFamily="34" charset="0"/>
+                          <a:ea typeface="Calibri" pitchFamily="34" charset="-122"/>
+                          <a:cs typeface="Calibri" pitchFamily="34" charset="-120"/>
+                        </a:rPr>
+                        <a:t>2.5K / 3.4K</a:t>
+                      </a:r>
+                      <a:endParaRPr lang="en-US" sz="1000" dirty="0">
+                        <a:latin typeface="Calibri" charset="0"/>
+                        <a:ea typeface="Calibri" charset="0"/>
+                        <a:cs typeface="Calibri" charset="0"/>
+                      </a:endParaRPr>
+                    </a:p>
+                  </a:txBody>
+                  <a:tcPr marL="36576" marR="36576" marT="36576" marB="36576" anchor="ctr">
+                    <a:lnL w="6350" cap="flat" cmpd="sng" algn="ctr">
+                      <a:solidFill>
+                        <a:srgbClr val="D1D5DB"/>
+                      </a:solidFill>
+                      <a:prstDash val="solid"/>
+                      <a:round/>
+                      <a:headEnd type="none" w="med" len="med"/>
+                      <a:tailEnd type="none" w="med" len="med"/>
+                    </a:lnL>
+                    <a:lnR w="6350" cap="flat" cmpd="sng" algn="ctr">
+                      <a:solidFill>
+                        <a:srgbClr val="D1D5DB"/>
+                      </a:solidFill>
+                      <a:prstDash val="solid"/>
+                      <a:round/>
+                      <a:headEnd type="none" w="med" len="med"/>
+                      <a:tailEnd type="none" w="med" len="med"/>
+                    </a:lnR>
+                    <a:lnT w="6350" cap="flat" cmpd="sng" algn="ctr">
+                      <a:solidFill>
+                        <a:srgbClr val="D1D5DB"/>
+                      </a:solidFill>
+                      <a:prstDash val="solid"/>
+                      <a:round/>
+                      <a:headEnd type="none" w="med" len="med"/>
+                      <a:tailEnd type="none" w="med" len="med"/>
+                    </a:lnT>
+                    <a:lnB w="6350" cap="flat" cmpd="sng" algn="ctr">
+                      <a:solidFill>
+                        <a:srgbClr val="D1D5DB"/>
+                      </a:solidFill>
+                      <a:prstDash val="solid"/>
+                      <a:round/>
+                      <a:headEnd type="none" w="med" len="med"/>
+                      <a:tailEnd type="none" w="med" len="med"/>
+                    </a:lnB>
+                    <a:solidFill>
+                      <a:srgbClr val="FFFFFF"/>
+                    </a:solidFill>
+                  </a:tcPr>
+                </a:tc>
+                <a:tc>
+                  <a:txBody>
+                    <a:bodyPr/>
+                    <a:lstStyle/>
+                    <a:p>
+                      <a:pPr algn="ctr" indent="0" marL="0">
+                        <a:buNone/>
+                      </a:pPr>
+                      <a:r>
+                        <a:rPr lang="en-US" sz="1000" dirty="0">
+                          <a:solidFill>
+                            <a:srgbClr val="1F2937"/>
+                          </a:solidFill>
+                          <a:latin typeface="Calibri" pitchFamily="34" charset="0"/>
+                          <a:ea typeface="Calibri" pitchFamily="34" charset="-122"/>
+                          <a:cs typeface="Calibri" pitchFamily="34" charset="-120"/>
+                        </a:rPr>
+                        <a:t>$0.014</a:t>
+                      </a:r>
+                      <a:endParaRPr lang="en-US" sz="1000" dirty="0">
+                        <a:latin typeface="Calibri" charset="0"/>
+                        <a:ea typeface="Calibri" charset="0"/>
+                        <a:cs typeface="Calibri" charset="0"/>
+                      </a:endParaRPr>
+                    </a:p>
+                  </a:txBody>
+                  <a:tcPr marL="36576" marR="36576" marT="36576" marB="36576" anchor="ctr">
+                    <a:lnL w="6350" cap="flat" cmpd="sng" algn="ctr">
+                      <a:solidFill>
+                        <a:srgbClr val="D1D5DB"/>
+                      </a:solidFill>
+                      <a:prstDash val="solid"/>
+                      <a:round/>
+                      <a:headEnd type="none" w="med" len="med"/>
+                      <a:tailEnd type="none" w="med" len="med"/>
+                    </a:lnL>
+                    <a:lnR w="6350" cap="flat" cmpd="sng" algn="ctr">
+                      <a:solidFill>
+                        <a:srgbClr val="D1D5DB"/>
+                      </a:solidFill>
+                      <a:prstDash val="solid"/>
+                      <a:round/>
+                      <a:headEnd type="none" w="med" len="med"/>
+                      <a:tailEnd type="none" w="med" len="med"/>
+                    </a:lnR>
+                    <a:lnT w="6350" cap="flat" cmpd="sng" algn="ctr">
+                      <a:solidFill>
+                        <a:srgbClr val="D1D5DB"/>
+                      </a:solidFill>
+                      <a:prstDash val="solid"/>
+                      <a:round/>
+                      <a:headEnd type="none" w="med" len="med"/>
+                      <a:tailEnd type="none" w="med" len="med"/>
+                    </a:lnT>
+                    <a:lnB w="6350" cap="flat" cmpd="sng" algn="ctr">
+                      <a:solidFill>
+                        <a:srgbClr val="D1D5DB"/>
+                      </a:solidFill>
+                      <a:prstDash val="solid"/>
+                      <a:round/>
+                      <a:headEnd type="none" w="med" len="med"/>
+                      <a:tailEnd type="none" w="med" len="med"/>
+                    </a:lnB>
+                    <a:solidFill>
+                      <a:srgbClr val="FFFFFF"/>
                     </a:solidFill>
                   </a:tcPr>
                 </a:tc>
@@ -33221,7 +33563,7 @@
                 <a:ea typeface="Calibri" pitchFamily="34" charset="-122"/>
                 <a:cs typeface="Calibri" pitchFamily="34" charset="-120"/>
               </a:rPr>
-              <a:t>Scope is three conditions (non-frontier reader, or store beyond the context window, or cost-bound). With a strong reader on a 14K store the whole memory in the prompt beats the ledger (97.1 vs 90.7, p = 0.035); a Sonnet-built store closes the fidelity gap (133/133 rows) but not the score (92.1) — residual errors sit in multi-value position chains.</a:t>
+              <a:t>Scope is three conditions (non-frontier reader, or store beyond the context window, or cost-bound). With a strong reader on a 14K store the whole memory in the prompt beats the v45 ledger (97.1 vs 90.7, p = 0.035); Sonnet-built cards plus an assertion-type filter reach 95.0 (−2.1 vs full context, n.s.); the residual is one chain's extraction gap.</a:t>
             </a:r>
             <a:endParaRPr lang="en-US" sz="1250" dirty="0"/>
           </a:p>

--- a/results/weekly_report_20260904.pptx
+++ b/results/weekly_report_20260904.pptx
@@ -22396,7 +22396,7 @@
                 <a:ea typeface="Calibri" pitchFamily="34" charset="-122"/>
                 <a:cs typeface="Calibri" pitchFamily="34" charset="-120"/>
               </a:rPr>
-              <a:t>Same weak reader: ledger +21.4 over full context (p = 5e-6) at 1/2.8 the input tokens. Same strong reader: ledger −6.4 (p = 0.035); only the 2.8× cost edge survives.</a:t>
+              <a:t>Same weak reader: ledger +21.4 over full context (p = 5e-6) at 1/2.8 the input tokens. Same strong reader: the v45 ledger is −6.4 (p = 0.035); with Sonnet-built cards and the assertion-type filter the gap is −2.1 (p = 0.51) at 1/5.4 the input tokens.</a:t>
             </a:r>
             <a:endParaRPr lang="en-US" sz="1150" dirty="0"/>
           </a:p>

--- a/results/weekly_report_20260904.pptx
+++ b/results/weekly_report_20260904.pptx
@@ -7048,7 +7048,7 @@
                           <a:ea typeface="Calibri" pitchFamily="34" charset="-122"/>
                           <a:cs typeface="Calibri" pitchFamily="34" charset="-120"/>
                         </a:rPr>
-                        <a:t>104K store · strong reader</a:t>
+                        <a:t>104K store · strong reader (Sonnet 5, batch 40)</a:t>
                       </a:r>
                       <a:endParaRPr lang="en-US" sz="1050" dirty="0">
                         <a:latin typeface="Calibri" charset="0"/>
@@ -7116,7 +7116,7 @@
                           <a:ea typeface="Calibri" pitchFamily="34" charset="-122"/>
                           <a:cs typeface="Calibri" pitchFamily="34" charset="-120"/>
                         </a:rPr>
-                        <a:t>not run</a:t>
+                        <a:t>54.9 (142K tok; n = 82, 18% of calls hit the output cap)</a:t>
                       </a:r>
                       <a:endParaRPr lang="en-US" sz="1050" dirty="0">
                         <a:latin typeface="Calibri" charset="0"/>
@@ -7184,7 +7184,7 @@
                           <a:ea typeface="Calibri" pitchFamily="34" charset="-122"/>
                           <a:cs typeface="Calibri" pitchFamily="34" charset="-120"/>
                         </a:rPr>
-                        <a:t>not run</a:t>
+                        <a:t>67.5 (top-100, 11.6K tok)</a:t>
                       </a:r>
                       <a:endParaRPr lang="en-US" sz="1050" dirty="0">
                         <a:latin typeface="Calibri" charset="0"/>
@@ -7252,7 +7252,7 @@
                           <a:ea typeface="Calibri" pitchFamily="34" charset="-122"/>
                           <a:cs typeface="Calibri" pitchFamily="34" charset="-120"/>
                         </a:rPr>
-                        <a:t>not run</a:t>
+                        <a:t>74.2 projection (11.5K) · 73.3 full ledger</a:t>
                       </a:r>
                       <a:endParaRPr lang="en-US" sz="1050" dirty="0">
                         <a:latin typeface="Calibri" charset="0"/>
@@ -7320,7 +7320,7 @@
                           <a:ea typeface="Calibri" pitchFamily="34" charset="-122"/>
                           <a:cs typeface="Calibri" pitchFamily="34" charset="-120"/>
                         </a:rPr>
-                        <a:t>the decisive missing cell (~$30)</a:t>
+                        <a:t>+17.1 vs full context on the same 82 q, p = 0.024 (21-store CI crosses zero: 9 stores unfinished); projection costs 1/9 of full context</a:t>
                       </a:r>
                       <a:endParaRPr lang="en-US" sz="1050" dirty="0">
                         <a:latin typeface="Calibri" charset="0"/>
@@ -17960,7 +17960,7 @@
                           <a:ea typeface="Calibri" pitchFamily="34" charset="-122"/>
                           <a:cs typeface="Calibri" pitchFamily="34" charset="-120"/>
                         </a:rPr>
-                        <a:t>Holdout set: 40 new chains / 160 q, zero QID overlap</a:t>
+                        <a:t>Holdout set: 80 chains / 320 q, zero QID overlap (40 added this week, chain-length matched, new seed)</a:t>
                       </a:r>
                       <a:endParaRPr lang="en-US" sz="1100" dirty="0">
                         <a:latin typeface="Calibri" charset="0"/>
@@ -18028,7 +18028,7 @@
                           <a:ea typeface="Calibri" pitchFamily="34" charset="-122"/>
                           <a:cs typeface="Calibri" pitchFamily="34" charset="-120"/>
                         </a:rPr>
-                        <a:t>QVF 95.0 vs direct 51.9 (+43.1)</a:t>
+                        <a:t>new 40: QVF 90.6 vs direct 50.6 (+40.0, cluster CI [31.3, 48.1]); pooled 80: +41.56 vs main field +41.49</a:t>
                       </a:r>
                       <a:endParaRPr lang="en-US" sz="1100" dirty="0">
                         <a:latin typeface="Calibri" charset="0"/>
@@ -18096,7 +18096,7 @@
                           <a:ea typeface="Calibri" pitchFamily="34" charset="-122"/>
                           <a:cs typeface="Calibri" pitchFamily="34" charset="-120"/>
                         </a:rPr>
-                        <a:t>no overfitting to the development chains</a:t>
+                        <a:t>no overfitting to the development chains; full-context haiku 72.5 sits between</a:t>
                       </a:r>
                       <a:endParaRPr lang="en-US" sz="1100" dirty="0">
                         <a:latin typeface="Calibri" charset="0"/>
@@ -19598,7 +19598,7 @@
                 <a:gridCol w="1737360"/>
                 <a:gridCol w="1005840"/>
               </a:tblGrid>
-              <a:tr h="384048">
+              <a:tr h="347472">
                 <a:tc>
                   <a:txBody>
                     <a:bodyPr/>
@@ -19608,7 +19608,7 @@
                         <a:buNone/>
                       </a:pPr>
                       <a:r>
-                        <a:rPr lang="en-US" sz="1000" b="1" dirty="0">
+                        <a:rPr lang="en-US" sz="950" b="1" dirty="0">
                           <a:solidFill>
                             <a:srgbClr val="FFFFFF"/>
                           </a:solidFill>
@@ -19618,7 +19618,7 @@
                         </a:rPr>
                         <a:t>Arm</a:t>
                       </a:r>
-                      <a:endParaRPr lang="en-US" sz="1000" dirty="0">
+                      <a:endParaRPr lang="en-US" sz="950" dirty="0">
                         <a:latin typeface="Calibri" charset="0"/>
                         <a:ea typeface="Calibri" charset="0"/>
                         <a:cs typeface="Calibri" charset="0"/>
@@ -19676,7 +19676,7 @@
                         <a:buNone/>
                       </a:pPr>
                       <a:r>
-                        <a:rPr lang="en-US" sz="1000" b="1" dirty="0">
+                        <a:rPr lang="en-US" sz="950" b="1" dirty="0">
                           <a:solidFill>
                             <a:srgbClr val="FFFFFF"/>
                           </a:solidFill>
@@ -19686,7 +19686,7 @@
                         </a:rPr>
                         <a:t>haiku-4.5</a:t>
                       </a:r>
-                      <a:endParaRPr lang="en-US" sz="1000" dirty="0">
+                      <a:endParaRPr lang="en-US" sz="950" dirty="0">
                         <a:latin typeface="Calibri" charset="0"/>
                         <a:ea typeface="Calibri" charset="0"/>
                         <a:cs typeface="Calibri" charset="0"/>
@@ -19744,7 +19744,7 @@
                         <a:buNone/>
                       </a:pPr>
                       <a:r>
-                        <a:rPr lang="en-US" sz="1000" b="1" dirty="0">
+                        <a:rPr lang="en-US" sz="950" b="1" dirty="0">
                           <a:solidFill>
                             <a:srgbClr val="FFFFFF"/>
                           </a:solidFill>
@@ -19754,7 +19754,7 @@
                         </a:rPr>
                         <a:t>Sonnet 5</a:t>
                       </a:r>
-                      <a:endParaRPr lang="en-US" sz="1000" dirty="0">
+                      <a:endParaRPr lang="en-US" sz="950" dirty="0">
                         <a:latin typeface="Calibri" charset="0"/>
                         <a:ea typeface="Calibri" charset="0"/>
                         <a:cs typeface="Calibri" charset="0"/>
@@ -19812,7 +19812,7 @@
                         <a:buNone/>
                       </a:pPr>
                       <a:r>
-                        <a:rPr lang="en-US" sz="1000" b="1" dirty="0">
+                        <a:rPr lang="en-US" sz="950" b="1" dirty="0">
                           <a:solidFill>
                             <a:srgbClr val="FFFFFF"/>
                           </a:solidFill>
@@ -19822,7 +19822,7 @@
                         </a:rPr>
                         <a:t>In tok / q (haiku / Sonnet)</a:t>
                       </a:r>
-                      <a:endParaRPr lang="en-US" sz="1000" dirty="0">
+                      <a:endParaRPr lang="en-US" sz="950" dirty="0">
                         <a:latin typeface="Calibri" charset="0"/>
                         <a:ea typeface="Calibri" charset="0"/>
                         <a:cs typeface="Calibri" charset="0"/>
@@ -19880,7 +19880,7 @@
                         <a:buNone/>
                       </a:pPr>
                       <a:r>
-                        <a:rPr lang="en-US" sz="1000" b="1" dirty="0">
+                        <a:rPr lang="en-US" sz="950" b="1" dirty="0">
                           <a:solidFill>
                             <a:srgbClr val="FFFFFF"/>
                           </a:solidFill>
@@ -19890,7 +19890,7 @@
                         </a:rPr>
                         <a:t>$ / q (Sonnet)</a:t>
                       </a:r>
-                      <a:endParaRPr lang="en-US" sz="1000" dirty="0">
+                      <a:endParaRPr lang="en-US" sz="950" dirty="0">
                         <a:latin typeface="Calibri" charset="0"/>
                         <a:ea typeface="Calibri" charset="0"/>
                         <a:cs typeface="Calibri" charset="0"/>
@@ -19940,7 +19940,7 @@
                   </a:tcPr>
                 </a:tc>
               </a:tr>
-              <a:tr h="384048">
+              <a:tr h="347472">
                 <a:tc>
                   <a:txBody>
                     <a:bodyPr/>
@@ -19950,7 +19950,7 @@
                         <a:buNone/>
                       </a:pPr>
                       <a:r>
-                        <a:rPr lang="en-US" sz="1000" dirty="0">
+                        <a:rPr lang="en-US" sz="950" dirty="0">
                           <a:solidFill>
                             <a:srgbClr val="1F2937"/>
                           </a:solidFill>
@@ -19960,7 +19960,7 @@
                         </a:rPr>
                         <a:t>Whole memory in prompt, plain call</a:t>
                       </a:r>
-                      <a:endParaRPr lang="en-US" sz="1000" dirty="0">
+                      <a:endParaRPr lang="en-US" sz="950" dirty="0">
                         <a:latin typeface="Calibri" charset="0"/>
                         <a:ea typeface="Calibri" charset="0"/>
                         <a:cs typeface="Calibri" charset="0"/>
@@ -20018,7 +20018,7 @@
                         <a:buNone/>
                       </a:pPr>
                       <a:r>
-                        <a:rPr lang="en-US" sz="1000" dirty="0">
+                        <a:rPr lang="en-US" sz="950" dirty="0">
                           <a:solidFill>
                             <a:srgbClr val="1F2937"/>
                           </a:solidFill>
@@ -20028,7 +20028,7 @@
                         </a:rPr>
                         <a:t>70.0</a:t>
                       </a:r>
-                      <a:endParaRPr lang="en-US" sz="1000" dirty="0">
+                      <a:endParaRPr lang="en-US" sz="950" dirty="0">
                         <a:latin typeface="Calibri" charset="0"/>
                         <a:ea typeface="Calibri" charset="0"/>
                         <a:cs typeface="Calibri" charset="0"/>
@@ -20086,7 +20086,7 @@
                         <a:buNone/>
                       </a:pPr>
                       <a:r>
-                        <a:rPr lang="en-US" sz="1000" dirty="0">
+                        <a:rPr lang="en-US" sz="950" dirty="0">
                           <a:solidFill>
                             <a:srgbClr val="1F2937"/>
                           </a:solidFill>
@@ -20096,7 +20096,7 @@
                         </a:rPr>
                         <a:t>97.1 (max_tokens 4000; 87.9 at 800 because thinking shares the cap)</a:t>
                       </a:r>
-                      <a:endParaRPr lang="en-US" sz="1000" dirty="0">
+                      <a:endParaRPr lang="en-US" sz="950" dirty="0">
                         <a:latin typeface="Calibri" charset="0"/>
                         <a:ea typeface="Calibri" charset="0"/>
                         <a:cs typeface="Calibri" charset="0"/>
@@ -20154,7 +20154,7 @@
                         <a:buNone/>
                       </a:pPr>
                       <a:r>
-                        <a:rPr lang="en-US" sz="1000" dirty="0">
+                        <a:rPr lang="en-US" sz="950" dirty="0">
                           <a:solidFill>
                             <a:srgbClr val="1F2937"/>
                           </a:solidFill>
@@ -20164,7 +20164,7 @@
                         </a:rPr>
                         <a:t>13.6K / 18.5K</a:t>
                       </a:r>
-                      <a:endParaRPr lang="en-US" sz="1000" dirty="0">
+                      <a:endParaRPr lang="en-US" sz="950" dirty="0">
                         <a:latin typeface="Calibri" charset="0"/>
                         <a:ea typeface="Calibri" charset="0"/>
                         <a:cs typeface="Calibri" charset="0"/>
@@ -20222,7 +20222,7 @@
                         <a:buNone/>
                       </a:pPr>
                       <a:r>
-                        <a:rPr lang="en-US" sz="1000" dirty="0">
+                        <a:rPr lang="en-US" sz="950" dirty="0">
                           <a:solidFill>
                             <a:srgbClr val="1F2937"/>
                           </a:solidFill>
@@ -20232,7 +20232,7 @@
                         </a:rPr>
                         <a:t>$0.042</a:t>
                       </a:r>
-                      <a:endParaRPr lang="en-US" sz="1000" dirty="0">
+                      <a:endParaRPr lang="en-US" sz="950" dirty="0">
                         <a:latin typeface="Calibri" charset="0"/>
                         <a:ea typeface="Calibri" charset="0"/>
                         <a:cs typeface="Calibri" charset="0"/>
@@ -20282,7 +20282,7 @@
                   </a:tcPr>
                 </a:tc>
               </a:tr>
-              <a:tr h="384048">
+              <a:tr h="347472">
                 <a:tc>
                   <a:txBody>
                     <a:bodyPr/>
@@ -20292,7 +20292,7 @@
                         <a:buNone/>
                       </a:pPr>
                       <a:r>
-                        <a:rPr lang="en-US" sz="1000" dirty="0">
+                        <a:rPr lang="en-US" sz="950" dirty="0">
                           <a:solidFill>
                             <a:srgbClr val="1F2937"/>
                           </a:solidFill>
@@ -20302,7 +20302,7 @@
                         </a:rPr>
                         <a:t>Archived plain full text (other user-prompt wording, same bytes)</a:t>
                       </a:r>
-                      <a:endParaRPr lang="en-US" sz="1000" dirty="0">
+                      <a:endParaRPr lang="en-US" sz="950" dirty="0">
                         <a:latin typeface="Calibri" charset="0"/>
                         <a:ea typeface="Calibri" charset="0"/>
                         <a:cs typeface="Calibri" charset="0"/>
@@ -20360,7 +20360,7 @@
                         <a:buNone/>
                       </a:pPr>
                       <a:r>
-                        <a:rPr lang="en-US" sz="1000" dirty="0">
+                        <a:rPr lang="en-US" sz="950" dirty="0">
                           <a:solidFill>
                             <a:srgbClr val="1F2937"/>
                           </a:solidFill>
@@ -20370,7 +20370,7 @@
                         </a:rPr>
                         <a:t>58.6</a:t>
                       </a:r>
-                      <a:endParaRPr lang="en-US" sz="1000" dirty="0">
+                      <a:endParaRPr lang="en-US" sz="950" dirty="0">
                         <a:latin typeface="Calibri" charset="0"/>
                         <a:ea typeface="Calibri" charset="0"/>
                         <a:cs typeface="Calibri" charset="0"/>
@@ -20428,7 +20428,7 @@
                         <a:buNone/>
                       </a:pPr>
                       <a:r>
-                        <a:rPr lang="en-US" sz="1000" dirty="0">
+                        <a:rPr lang="en-US" sz="950" dirty="0">
                           <a:solidFill>
                             <a:srgbClr val="1F2937"/>
                           </a:solidFill>
@@ -20438,7 +20438,7 @@
                         </a:rPr>
                         <a:t>84.8</a:t>
                       </a:r>
-                      <a:endParaRPr lang="en-US" sz="1000" dirty="0">
+                      <a:endParaRPr lang="en-US" sz="950" dirty="0">
                         <a:latin typeface="Calibri" charset="0"/>
                         <a:ea typeface="Calibri" charset="0"/>
                         <a:cs typeface="Calibri" charset="0"/>
@@ -20496,7 +20496,7 @@
                         <a:buNone/>
                       </a:pPr>
                       <a:r>
-                        <a:rPr lang="en-US" sz="1000" dirty="0">
+                        <a:rPr lang="en-US" sz="950" dirty="0">
                           <a:solidFill>
                             <a:srgbClr val="1F2937"/>
                           </a:solidFill>
@@ -20506,7 +20506,7 @@
                         </a:rPr>
                         <a:t>13.6K / 18.6K</a:t>
                       </a:r>
-                      <a:endParaRPr lang="en-US" sz="1000" dirty="0">
+                      <a:endParaRPr lang="en-US" sz="950" dirty="0">
                         <a:latin typeface="Calibri" charset="0"/>
                         <a:ea typeface="Calibri" charset="0"/>
                         <a:cs typeface="Calibri" charset="0"/>
@@ -20564,7 +20564,7 @@
                         <a:buNone/>
                       </a:pPr>
                       <a:r>
-                        <a:rPr lang="en-US" sz="1000" dirty="0">
+                        <a:rPr lang="en-US" sz="950" dirty="0">
                           <a:solidFill>
                             <a:srgbClr val="1F2937"/>
                           </a:solidFill>
@@ -20574,7 +20574,7 @@
                         </a:rPr>
                         <a:t>$0.039</a:t>
                       </a:r>
-                      <a:endParaRPr lang="en-US" sz="1000" dirty="0">
+                      <a:endParaRPr lang="en-US" sz="950" dirty="0">
                         <a:latin typeface="Calibri" charset="0"/>
                         <a:ea typeface="Calibri" charset="0"/>
                         <a:cs typeface="Calibri" charset="0"/>
@@ -20624,7 +20624,7 @@
                   </a:tcPr>
                 </a:tc>
               </a:tr>
-              <a:tr h="384048">
+              <a:tr h="347472">
                 <a:tc>
                   <a:txBody>
                     <a:bodyPr/>
@@ -20634,7 +20634,7 @@
                         <a:buNone/>
                       </a:pPr>
                       <a:r>
-                        <a:rPr lang="en-US" sz="1000" dirty="0">
+                        <a:rPr lang="en-US" sz="950" dirty="0">
                           <a:solidFill>
                             <a:srgbClr val="1F2937"/>
                           </a:solidFill>
@@ -20644,7 +20644,7 @@
                         </a:rPr>
                         <a:t>Full text + trajectory protocol</a:t>
                       </a:r>
-                      <a:endParaRPr lang="en-US" sz="1000" dirty="0">
+                      <a:endParaRPr lang="en-US" sz="950" dirty="0">
                         <a:latin typeface="Calibri" charset="0"/>
                         <a:ea typeface="Calibri" charset="0"/>
                         <a:cs typeface="Calibri" charset="0"/>
@@ -20702,7 +20702,7 @@
                         <a:buNone/>
                       </a:pPr>
                       <a:r>
-                        <a:rPr lang="en-US" sz="1000" dirty="0">
+                        <a:rPr lang="en-US" sz="950" dirty="0">
                           <a:solidFill>
                             <a:srgbClr val="1F2937"/>
                           </a:solidFill>
@@ -20712,7 +20712,7 @@
                         </a:rPr>
                         <a:t>92.9</a:t>
                       </a:r>
-                      <a:endParaRPr lang="en-US" sz="1000" dirty="0">
+                      <a:endParaRPr lang="en-US" sz="950" dirty="0">
                         <a:latin typeface="Calibri" charset="0"/>
                         <a:ea typeface="Calibri" charset="0"/>
                         <a:cs typeface="Calibri" charset="0"/>
@@ -20770,7 +20770,7 @@
                         <a:buNone/>
                       </a:pPr>
                       <a:r>
-                        <a:rPr lang="en-US" sz="1000" dirty="0">
+                        <a:rPr lang="en-US" sz="950" dirty="0">
                           <a:solidFill>
                             <a:srgbClr val="1F2937"/>
                           </a:solidFill>
@@ -20780,7 +20780,7 @@
                         </a:rPr>
                         <a:t>—</a:t>
                       </a:r>
-                      <a:endParaRPr lang="en-US" sz="1000" dirty="0">
+                      <a:endParaRPr lang="en-US" sz="950" dirty="0">
                         <a:latin typeface="Calibri" charset="0"/>
                         <a:ea typeface="Calibri" charset="0"/>
                         <a:cs typeface="Calibri" charset="0"/>
@@ -20838,7 +20838,7 @@
                         <a:buNone/>
                       </a:pPr>
                       <a:r>
-                        <a:rPr lang="en-US" sz="1000" dirty="0">
+                        <a:rPr lang="en-US" sz="950" dirty="0">
                           <a:solidFill>
                             <a:srgbClr val="1F2937"/>
                           </a:solidFill>
@@ -20848,7 +20848,7 @@
                         </a:rPr>
                         <a:t>13.8K</a:t>
                       </a:r>
-                      <a:endParaRPr lang="en-US" sz="1000" dirty="0">
+                      <a:endParaRPr lang="en-US" sz="950" dirty="0">
                         <a:latin typeface="Calibri" charset="0"/>
                         <a:ea typeface="Calibri" charset="0"/>
                         <a:cs typeface="Calibri" charset="0"/>
@@ -20906,7 +20906,7 @@
                         <a:buNone/>
                       </a:pPr>
                       <a:r>
-                        <a:rPr lang="en-US" sz="1000" dirty="0">
+                        <a:rPr lang="en-US" sz="950" dirty="0">
                           <a:solidFill>
                             <a:srgbClr val="1F2937"/>
                           </a:solidFill>
@@ -20916,7 +20916,7 @@
                         </a:rPr>
                         <a:t>—</a:t>
                       </a:r>
-                      <a:endParaRPr lang="en-US" sz="1000" dirty="0">
+                      <a:endParaRPr lang="en-US" sz="950" dirty="0">
                         <a:latin typeface="Calibri" charset="0"/>
                         <a:ea typeface="Calibri" charset="0"/>
                         <a:cs typeface="Calibri" charset="0"/>
@@ -20966,7 +20966,7 @@
                   </a:tcPr>
                 </a:tc>
               </a:tr>
-              <a:tr h="384048">
+              <a:tr h="347472">
                 <a:tc>
                   <a:txBody>
                     <a:bodyPr/>
@@ -20976,7 +20976,7 @@
                         <a:buNone/>
                       </a:pPr>
                       <a:r>
-                        <a:rPr lang="en-US" sz="1000" dirty="0">
+                        <a:rPr lang="en-US" sz="950" dirty="0">
                           <a:solidFill>
                             <a:srgbClr val="1F2937"/>
                           </a:solidFill>
@@ -20986,7 +20986,7 @@
                         </a:rPr>
                         <a:t>Top-10 retrieval (direct)</a:t>
                       </a:r>
-                      <a:endParaRPr lang="en-US" sz="1000" dirty="0">
+                      <a:endParaRPr lang="en-US" sz="950" dirty="0">
                         <a:latin typeface="Calibri" charset="0"/>
                         <a:ea typeface="Calibri" charset="0"/>
                         <a:cs typeface="Calibri" charset="0"/>
@@ -21044,7 +21044,7 @@
                         <a:buNone/>
                       </a:pPr>
                       <a:r>
-                        <a:rPr lang="en-US" sz="1000" dirty="0">
+                        <a:rPr lang="en-US" sz="950" dirty="0">
                           <a:solidFill>
                             <a:srgbClr val="1F2937"/>
                           </a:solidFill>
@@ -21054,7 +21054,7 @@
                         </a:rPr>
                         <a:t>50.7</a:t>
                       </a:r>
-                      <a:endParaRPr lang="en-US" sz="1000" dirty="0">
+                      <a:endParaRPr lang="en-US" sz="950" dirty="0">
                         <a:latin typeface="Calibri" charset="0"/>
                         <a:ea typeface="Calibri" charset="0"/>
                         <a:cs typeface="Calibri" charset="0"/>
@@ -21112,7 +21112,7 @@
                         <a:buNone/>
                       </a:pPr>
                       <a:r>
-                        <a:rPr lang="en-US" sz="1000" dirty="0">
+                        <a:rPr lang="en-US" sz="950" dirty="0">
                           <a:solidFill>
                             <a:srgbClr val="1F2937"/>
                           </a:solidFill>
@@ -21122,7 +21122,7 @@
                         </a:rPr>
                         <a:t>70.7</a:t>
                       </a:r>
-                      <a:endParaRPr lang="en-US" sz="1000" dirty="0">
+                      <a:endParaRPr lang="en-US" sz="950" dirty="0">
                         <a:latin typeface="Calibri" charset="0"/>
                         <a:ea typeface="Calibri" charset="0"/>
                         <a:cs typeface="Calibri" charset="0"/>
@@ -21180,7 +21180,7 @@
                         <a:buNone/>
                       </a:pPr>
                       <a:r>
-                        <a:rPr lang="en-US" sz="1000" dirty="0">
+                        <a:rPr lang="en-US" sz="950" dirty="0">
                           <a:solidFill>
                             <a:srgbClr val="1F2937"/>
                           </a:solidFill>
@@ -21190,7 +21190,7 @@
                         </a:rPr>
                         <a:t>0.9K / 1.1K</a:t>
                       </a:r>
-                      <a:endParaRPr lang="en-US" sz="1000" dirty="0">
+                      <a:endParaRPr lang="en-US" sz="950" dirty="0">
                         <a:latin typeface="Calibri" charset="0"/>
                         <a:ea typeface="Calibri" charset="0"/>
                         <a:cs typeface="Calibri" charset="0"/>
@@ -21248,7 +21248,7 @@
                         <a:buNone/>
                       </a:pPr>
                       <a:r>
-                        <a:rPr lang="en-US" sz="1000" dirty="0">
+                        <a:rPr lang="en-US" sz="950" dirty="0">
                           <a:solidFill>
                             <a:srgbClr val="1F2937"/>
                           </a:solidFill>
@@ -21258,7 +21258,7 @@
                         </a:rPr>
                         <a:t>$0.005</a:t>
                       </a:r>
-                      <a:endParaRPr lang="en-US" sz="1000" dirty="0">
+                      <a:endParaRPr lang="en-US" sz="950" dirty="0">
                         <a:latin typeface="Calibri" charset="0"/>
                         <a:ea typeface="Calibri" charset="0"/>
                         <a:cs typeface="Calibri" charset="0"/>
@@ -21308,7 +21308,7 @@
                   </a:tcPr>
                 </a:tc>
               </a:tr>
-              <a:tr h="384048">
+              <a:tr h="347472">
                 <a:tc>
                   <a:txBody>
                     <a:bodyPr/>
@@ -21318,7 +21318,7 @@
                         <a:buNone/>
                       </a:pPr>
                       <a:r>
-                        <a:rPr lang="en-US" sz="1000" b="1" dirty="0">
+                        <a:rPr lang="en-US" sz="950" b="1" dirty="0">
                           <a:solidFill>
                             <a:srgbClr val="1F2937"/>
                           </a:solidFill>
@@ -21328,7 +21328,7 @@
                         </a:rPr>
                         <a:t>QVF ledger (store v45)</a:t>
                       </a:r>
-                      <a:endParaRPr lang="en-US" sz="1000" dirty="0">
+                      <a:endParaRPr lang="en-US" sz="950" dirty="0">
                         <a:latin typeface="Calibri" charset="0"/>
                         <a:ea typeface="Calibri" charset="0"/>
                         <a:cs typeface="Calibri" charset="0"/>
@@ -21386,7 +21386,7 @@
                         <a:buNone/>
                       </a:pPr>
                       <a:r>
-                        <a:rPr lang="en-US" sz="1000" b="1" dirty="0">
+                        <a:rPr lang="en-US" sz="950" b="1" dirty="0">
                           <a:solidFill>
                             <a:srgbClr val="1F2937"/>
                           </a:solidFill>
@@ -21396,7 +21396,7 @@
                         </a:rPr>
                         <a:t>91.4</a:t>
                       </a:r>
-                      <a:endParaRPr lang="en-US" sz="1000" dirty="0">
+                      <a:endParaRPr lang="en-US" sz="950" dirty="0">
                         <a:latin typeface="Calibri" charset="0"/>
                         <a:ea typeface="Calibri" charset="0"/>
                         <a:cs typeface="Calibri" charset="0"/>
@@ -21454,7 +21454,7 @@
                         <a:buNone/>
                       </a:pPr>
                       <a:r>
-                        <a:rPr lang="en-US" sz="1000" b="1" dirty="0">
+                        <a:rPr lang="en-US" sz="950" b="1" dirty="0">
                           <a:solidFill>
                             <a:srgbClr val="1F2937"/>
                           </a:solidFill>
@@ -21464,7 +21464,7 @@
                         </a:rPr>
                         <a:t>90.7</a:t>
                       </a:r>
-                      <a:endParaRPr lang="en-US" sz="1000" dirty="0">
+                      <a:endParaRPr lang="en-US" sz="950" dirty="0">
                         <a:latin typeface="Calibri" charset="0"/>
                         <a:ea typeface="Calibri" charset="0"/>
                         <a:cs typeface="Calibri" charset="0"/>
@@ -21522,7 +21522,7 @@
                         <a:buNone/>
                       </a:pPr>
                       <a:r>
-                        <a:rPr lang="en-US" sz="1000" dirty="0">
+                        <a:rPr lang="en-US" sz="950" dirty="0">
                           <a:solidFill>
                             <a:srgbClr val="1F2937"/>
                           </a:solidFill>
@@ -21532,7 +21532,7 @@
                         </a:rPr>
                         <a:t>2.8K / 3.7K</a:t>
                       </a:r>
-                      <a:endParaRPr lang="en-US" sz="1000" dirty="0">
+                      <a:endParaRPr lang="en-US" sz="950" dirty="0">
                         <a:latin typeface="Calibri" charset="0"/>
                         <a:ea typeface="Calibri" charset="0"/>
                         <a:cs typeface="Calibri" charset="0"/>
@@ -21590,7 +21590,7 @@
                         <a:buNone/>
                       </a:pPr>
                       <a:r>
-                        <a:rPr lang="en-US" sz="1000" dirty="0">
+                        <a:rPr lang="en-US" sz="950" dirty="0">
                           <a:solidFill>
                             <a:srgbClr val="1F2937"/>
                           </a:solidFill>
@@ -21600,7 +21600,7 @@
                         </a:rPr>
                         <a:t>$0.015</a:t>
                       </a:r>
-                      <a:endParaRPr lang="en-US" sz="1000" dirty="0">
+                      <a:endParaRPr lang="en-US" sz="950" dirty="0">
                         <a:latin typeface="Calibri" charset="0"/>
                         <a:ea typeface="Calibri" charset="0"/>
                         <a:cs typeface="Calibri" charset="0"/>
@@ -21650,7 +21650,7 @@
                   </a:tcPr>
                 </a:tc>
               </a:tr>
-              <a:tr h="384048">
+              <a:tr h="347472">
                 <a:tc>
                   <a:txBody>
                     <a:bodyPr/>
@@ -21660,7 +21660,7 @@
                         <a:buNone/>
                       </a:pPr>
                       <a:r>
-                        <a:rPr lang="en-US" sz="1000" dirty="0">
+                        <a:rPr lang="en-US" sz="950" dirty="0">
                           <a:solidFill>
                             <a:srgbClr val="1F2937"/>
                           </a:solidFill>
@@ -21670,7 +21670,7 @@
                         </a:rPr>
                         <a:t>QVF ledger, Sonnet-built cards (v47s)</a:t>
                       </a:r>
-                      <a:endParaRPr lang="en-US" sz="1000" dirty="0">
+                      <a:endParaRPr lang="en-US" sz="950" dirty="0">
                         <a:latin typeface="Calibri" charset="0"/>
                         <a:ea typeface="Calibri" charset="0"/>
                         <a:cs typeface="Calibri" charset="0"/>
@@ -21728,7 +21728,7 @@
                         <a:buNone/>
                       </a:pPr>
                       <a:r>
-                        <a:rPr lang="en-US" sz="1000" dirty="0">
+                        <a:rPr lang="en-US" sz="950" dirty="0">
                           <a:solidFill>
                             <a:srgbClr val="1F2937"/>
                           </a:solidFill>
@@ -21738,7 +21738,7 @@
                         </a:rPr>
                         <a:t>92.9</a:t>
                       </a:r>
-                      <a:endParaRPr lang="en-US" sz="1000" dirty="0">
+                      <a:endParaRPr lang="en-US" sz="950" dirty="0">
                         <a:latin typeface="Calibri" charset="0"/>
                         <a:ea typeface="Calibri" charset="0"/>
                         <a:cs typeface="Calibri" charset="0"/>
@@ -21796,7 +21796,7 @@
                         <a:buNone/>
                       </a:pPr>
                       <a:r>
-                        <a:rPr lang="en-US" sz="1000" dirty="0">
+                        <a:rPr lang="en-US" sz="950" dirty="0">
                           <a:solidFill>
                             <a:srgbClr val="1F2937"/>
                           </a:solidFill>
@@ -21806,7 +21806,7 @@
                         </a:rPr>
                         <a:t>92.1</a:t>
                       </a:r>
-                      <a:endParaRPr lang="en-US" sz="1000" dirty="0">
+                      <a:endParaRPr lang="en-US" sz="950" dirty="0">
                         <a:latin typeface="Calibri" charset="0"/>
                         <a:ea typeface="Calibri" charset="0"/>
                         <a:cs typeface="Calibri" charset="0"/>
@@ -21864,7 +21864,7 @@
                         <a:buNone/>
                       </a:pPr>
                       <a:r>
-                        <a:rPr lang="en-US" sz="1000" dirty="0">
+                        <a:rPr lang="en-US" sz="950" dirty="0">
                           <a:solidFill>
                             <a:srgbClr val="1F2937"/>
                           </a:solidFill>
@@ -21874,7 +21874,7 @@
                         </a:rPr>
                         <a:t>2.6K / 3.5K</a:t>
                       </a:r>
-                      <a:endParaRPr lang="en-US" sz="1000" dirty="0">
+                      <a:endParaRPr lang="en-US" sz="950" dirty="0">
                         <a:latin typeface="Calibri" charset="0"/>
                         <a:ea typeface="Calibri" charset="0"/>
                         <a:cs typeface="Calibri" charset="0"/>
@@ -21932,7 +21932,7 @@
                         <a:buNone/>
                       </a:pPr>
                       <a:r>
-                        <a:rPr lang="en-US" sz="1000" dirty="0">
+                        <a:rPr lang="en-US" sz="950" dirty="0">
                           <a:solidFill>
                             <a:srgbClr val="1F2937"/>
                           </a:solidFill>
@@ -21942,7 +21942,7 @@
                         </a:rPr>
                         <a:t>$0.015</a:t>
                       </a:r>
-                      <a:endParaRPr lang="en-US" sz="1000" dirty="0">
+                      <a:endParaRPr lang="en-US" sz="950" dirty="0">
                         <a:latin typeface="Calibri" charset="0"/>
                         <a:ea typeface="Calibri" charset="0"/>
                         <a:cs typeface="Calibri" charset="0"/>
@@ -21992,7 +21992,7 @@
                   </a:tcPr>
                 </a:tc>
               </a:tr>
-              <a:tr h="384048">
+              <a:tr h="347472">
                 <a:tc>
                   <a:txBody>
                     <a:bodyPr/>
@@ -22002,7 +22002,7 @@
                         <a:buNone/>
                       </a:pPr>
                       <a:r>
-                        <a:rPr lang="en-US" sz="1000" b="1" dirty="0">
+                        <a:rPr lang="en-US" sz="950" b="1" dirty="0">
                           <a:solidFill>
                             <a:srgbClr val="1F2937"/>
                           </a:solidFill>
@@ -22012,7 +22012,7 @@
                         </a:rPr>
                         <a:t>QVF ledger, Sonnet-built + assertion-type filter (v47skf)</a:t>
                       </a:r>
-                      <a:endParaRPr lang="en-US" sz="1000" dirty="0">
+                      <a:endParaRPr lang="en-US" sz="950" dirty="0">
                         <a:latin typeface="Calibri" charset="0"/>
                         <a:ea typeface="Calibri" charset="0"/>
                         <a:cs typeface="Calibri" charset="0"/>
@@ -22070,7 +22070,7 @@
                         <a:buNone/>
                       </a:pPr>
                       <a:r>
-                        <a:rPr lang="en-US" sz="1000" b="1" dirty="0">
+                        <a:rPr lang="en-US" sz="950" b="1" dirty="0">
                           <a:solidFill>
                             <a:srgbClr val="1F2937"/>
                           </a:solidFill>
@@ -22080,7 +22080,7 @@
                         </a:rPr>
                         <a:t>93.6</a:t>
                       </a:r>
-                      <a:endParaRPr lang="en-US" sz="1000" dirty="0">
+                      <a:endParaRPr lang="en-US" sz="950" dirty="0">
                         <a:latin typeface="Calibri" charset="0"/>
                         <a:ea typeface="Calibri" charset="0"/>
                         <a:cs typeface="Calibri" charset="0"/>
@@ -22138,7 +22138,7 @@
                         <a:buNone/>
                       </a:pPr>
                       <a:r>
-                        <a:rPr lang="en-US" sz="1000" b="1" dirty="0">
+                        <a:rPr lang="en-US" sz="950" b="1" dirty="0">
                           <a:solidFill>
                             <a:srgbClr val="1F2937"/>
                           </a:solidFill>
@@ -22148,7 +22148,7 @@
                         </a:rPr>
                         <a:t>95.0</a:t>
                       </a:r>
-                      <a:endParaRPr lang="en-US" sz="1000" dirty="0">
+                      <a:endParaRPr lang="en-US" sz="950" dirty="0">
                         <a:latin typeface="Calibri" charset="0"/>
                         <a:ea typeface="Calibri" charset="0"/>
                         <a:cs typeface="Calibri" charset="0"/>
@@ -22206,7 +22206,7 @@
                         <a:buNone/>
                       </a:pPr>
                       <a:r>
-                        <a:rPr lang="en-US" sz="1000" dirty="0">
+                        <a:rPr lang="en-US" sz="950" dirty="0">
                           <a:solidFill>
                             <a:srgbClr val="1F2937"/>
                           </a:solidFill>
@@ -22216,7 +22216,7 @@
                         </a:rPr>
                         <a:t>2.5K / 3.4K</a:t>
                       </a:r>
-                      <a:endParaRPr lang="en-US" sz="1000" dirty="0">
+                      <a:endParaRPr lang="en-US" sz="950" dirty="0">
                         <a:latin typeface="Calibri" charset="0"/>
                         <a:ea typeface="Calibri" charset="0"/>
                         <a:cs typeface="Calibri" charset="0"/>
@@ -22274,7 +22274,7 @@
                         <a:buNone/>
                       </a:pPr>
                       <a:r>
-                        <a:rPr lang="en-US" sz="1000" dirty="0">
+                        <a:rPr lang="en-US" sz="950" dirty="0">
                           <a:solidFill>
                             <a:srgbClr val="1F2937"/>
                           </a:solidFill>
@@ -22284,7 +22284,7 @@
                         </a:rPr>
                         <a:t>$0.014</a:t>
                       </a:r>
-                      <a:endParaRPr lang="en-US" sz="1000" dirty="0">
+                      <a:endParaRPr lang="en-US" sz="950" dirty="0">
                         <a:latin typeface="Calibri" charset="0"/>
                         <a:ea typeface="Calibri" charset="0"/>
                         <a:cs typeface="Calibri" charset="0"/>
@@ -22330,6 +22330,348 @@
                     </a:lnB>
                     <a:solidFill>
                       <a:srgbClr val="FFFFFF"/>
+                    </a:solidFill>
+                  </a:tcPr>
+                </a:tc>
+              </a:tr>
+              <a:tr h="347472">
+                <a:tc>
+                  <a:txBody>
+                    <a:bodyPr/>
+                    <a:lstStyle/>
+                    <a:p>
+                      <a:pPr algn="l" indent="0" marL="0">
+                        <a:buNone/>
+                      </a:pPr>
+                      <a:r>
+                        <a:rPr lang="en-US" sz="950" dirty="0">
+                          <a:solidFill>
+                            <a:srgbClr val="1F2937"/>
+                          </a:solidFill>
+                          <a:latin typeface="Calibri" pitchFamily="34" charset="0"/>
+                          <a:ea typeface="Calibri" pitchFamily="34" charset="-122"/>
+                          <a:cs typeface="Calibri" pitchFamily="34" charset="-120"/>
+                        </a:rPr>
+                        <a:t>QVF ledger, + second extraction pass, union (v47skf2; ledger = gold 140/140)</a:t>
+                      </a:r>
+                      <a:endParaRPr lang="en-US" sz="950" dirty="0">
+                        <a:latin typeface="Calibri" charset="0"/>
+                        <a:ea typeface="Calibri" charset="0"/>
+                        <a:cs typeface="Calibri" charset="0"/>
+                      </a:endParaRPr>
+                    </a:p>
+                  </a:txBody>
+                  <a:tcPr marL="36576" marR="36576" marT="36576" marB="36576" anchor="ctr">
+                    <a:lnL w="6350" cap="flat" cmpd="sng" algn="ctr">
+                      <a:solidFill>
+                        <a:srgbClr val="D1D5DB"/>
+                      </a:solidFill>
+                      <a:prstDash val="solid"/>
+                      <a:round/>
+                      <a:headEnd type="none" w="med" len="med"/>
+                      <a:tailEnd type="none" w="med" len="med"/>
+                    </a:lnL>
+                    <a:lnR w="6350" cap="flat" cmpd="sng" algn="ctr">
+                      <a:solidFill>
+                        <a:srgbClr val="D1D5DB"/>
+                      </a:solidFill>
+                      <a:prstDash val="solid"/>
+                      <a:round/>
+                      <a:headEnd type="none" w="med" len="med"/>
+                      <a:tailEnd type="none" w="med" len="med"/>
+                    </a:lnR>
+                    <a:lnT w="6350" cap="flat" cmpd="sng" algn="ctr">
+                      <a:solidFill>
+                        <a:srgbClr val="D1D5DB"/>
+                      </a:solidFill>
+                      <a:prstDash val="solid"/>
+                      <a:round/>
+                      <a:headEnd type="none" w="med" len="med"/>
+                      <a:tailEnd type="none" w="med" len="med"/>
+                    </a:lnT>
+                    <a:lnB w="6350" cap="flat" cmpd="sng" algn="ctr">
+                      <a:solidFill>
+                        <a:srgbClr val="D1D5DB"/>
+                      </a:solidFill>
+                      <a:prstDash val="solid"/>
+                      <a:round/>
+                      <a:headEnd type="none" w="med" len="med"/>
+                      <a:tailEnd type="none" w="med" len="med"/>
+                    </a:lnB>
+                    <a:solidFill>
+                      <a:srgbClr val="F5F7FA"/>
+                    </a:solidFill>
+                  </a:tcPr>
+                </a:tc>
+                <a:tc>
+                  <a:txBody>
+                    <a:bodyPr/>
+                    <a:lstStyle/>
+                    <a:p>
+                      <a:pPr algn="ctr" indent="0" marL="0">
+                        <a:buNone/>
+                      </a:pPr>
+                      <a:r>
+                        <a:rPr lang="en-US" sz="950" dirty="0">
+                          <a:solidFill>
+                            <a:srgbClr val="1F2937"/>
+                          </a:solidFill>
+                          <a:latin typeface="Calibri" pitchFamily="34" charset="0"/>
+                          <a:ea typeface="Calibri" pitchFamily="34" charset="-122"/>
+                          <a:cs typeface="Calibri" pitchFamily="34" charset="-120"/>
+                        </a:rPr>
+                        <a:t>97.1</a:t>
+                      </a:r>
+                      <a:endParaRPr lang="en-US" sz="950" dirty="0">
+                        <a:latin typeface="Calibri" charset="0"/>
+                        <a:ea typeface="Calibri" charset="0"/>
+                        <a:cs typeface="Calibri" charset="0"/>
+                      </a:endParaRPr>
+                    </a:p>
+                  </a:txBody>
+                  <a:tcPr marL="36576" marR="36576" marT="36576" marB="36576" anchor="ctr">
+                    <a:lnL w="6350" cap="flat" cmpd="sng" algn="ctr">
+                      <a:solidFill>
+                        <a:srgbClr val="D1D5DB"/>
+                      </a:solidFill>
+                      <a:prstDash val="solid"/>
+                      <a:round/>
+                      <a:headEnd type="none" w="med" len="med"/>
+                      <a:tailEnd type="none" w="med" len="med"/>
+                    </a:lnL>
+                    <a:lnR w="6350" cap="flat" cmpd="sng" algn="ctr">
+                      <a:solidFill>
+                        <a:srgbClr val="D1D5DB"/>
+                      </a:solidFill>
+                      <a:prstDash val="solid"/>
+                      <a:round/>
+                      <a:headEnd type="none" w="med" len="med"/>
+                      <a:tailEnd type="none" w="med" len="med"/>
+                    </a:lnR>
+                    <a:lnT w="6350" cap="flat" cmpd="sng" algn="ctr">
+                      <a:solidFill>
+                        <a:srgbClr val="D1D5DB"/>
+                      </a:solidFill>
+                      <a:prstDash val="solid"/>
+                      <a:round/>
+                      <a:headEnd type="none" w="med" len="med"/>
+                      <a:tailEnd type="none" w="med" len="med"/>
+                    </a:lnT>
+                    <a:lnB w="6350" cap="flat" cmpd="sng" algn="ctr">
+                      <a:solidFill>
+                        <a:srgbClr val="D1D5DB"/>
+                      </a:solidFill>
+                      <a:prstDash val="solid"/>
+                      <a:round/>
+                      <a:headEnd type="none" w="med" len="med"/>
+                      <a:tailEnd type="none" w="med" len="med"/>
+                    </a:lnB>
+                    <a:solidFill>
+                      <a:srgbClr val="F5F7FA"/>
+                    </a:solidFill>
+                  </a:tcPr>
+                </a:tc>
+                <a:tc>
+                  <a:txBody>
+                    <a:bodyPr/>
+                    <a:lstStyle/>
+                    <a:p>
+                      <a:pPr algn="ctr" indent="0" marL="0">
+                        <a:buNone/>
+                      </a:pPr>
+                      <a:r>
+                        <a:rPr lang="en-US" sz="950" dirty="0">
+                          <a:solidFill>
+                            <a:srgbClr val="1F2937"/>
+                          </a:solidFill>
+                          <a:latin typeface="Calibri" pitchFamily="34" charset="0"/>
+                          <a:ea typeface="Calibri" pitchFamily="34" charset="-122"/>
+                          <a:cs typeface="Calibri" pitchFamily="34" charset="-120"/>
+                        </a:rPr>
+                        <a:t>93.6</a:t>
+                      </a:r>
+                      <a:endParaRPr lang="en-US" sz="950" dirty="0">
+                        <a:latin typeface="Calibri" charset="0"/>
+                        <a:ea typeface="Calibri" charset="0"/>
+                        <a:cs typeface="Calibri" charset="0"/>
+                      </a:endParaRPr>
+                    </a:p>
+                  </a:txBody>
+                  <a:tcPr marL="36576" marR="36576" marT="36576" marB="36576" anchor="ctr">
+                    <a:lnL w="6350" cap="flat" cmpd="sng" algn="ctr">
+                      <a:solidFill>
+                        <a:srgbClr val="D1D5DB"/>
+                      </a:solidFill>
+                      <a:prstDash val="solid"/>
+                      <a:round/>
+                      <a:headEnd type="none" w="med" len="med"/>
+                      <a:tailEnd type="none" w="med" len="med"/>
+                    </a:lnL>
+                    <a:lnR w="6350" cap="flat" cmpd="sng" algn="ctr">
+                      <a:solidFill>
+                        <a:srgbClr val="D1D5DB"/>
+                      </a:solidFill>
+                      <a:prstDash val="solid"/>
+                      <a:round/>
+                      <a:headEnd type="none" w="med" len="med"/>
+                      <a:tailEnd type="none" w="med" len="med"/>
+                    </a:lnR>
+                    <a:lnT w="6350" cap="flat" cmpd="sng" algn="ctr">
+                      <a:solidFill>
+                        <a:srgbClr val="D1D5DB"/>
+                      </a:solidFill>
+                      <a:prstDash val="solid"/>
+                      <a:round/>
+                      <a:headEnd type="none" w="med" len="med"/>
+                      <a:tailEnd type="none" w="med" len="med"/>
+                    </a:lnT>
+                    <a:lnB w="6350" cap="flat" cmpd="sng" algn="ctr">
+                      <a:solidFill>
+                        <a:srgbClr val="D1D5DB"/>
+                      </a:solidFill>
+                      <a:prstDash val="solid"/>
+                      <a:round/>
+                      <a:headEnd type="none" w="med" len="med"/>
+                      <a:tailEnd type="none" w="med" len="med"/>
+                    </a:lnB>
+                    <a:solidFill>
+                      <a:srgbClr val="F5F7FA"/>
+                    </a:solidFill>
+                  </a:tcPr>
+                </a:tc>
+                <a:tc>
+                  <a:txBody>
+                    <a:bodyPr/>
+                    <a:lstStyle/>
+                    <a:p>
+                      <a:pPr algn="ctr" indent="0" marL="0">
+                        <a:buNone/>
+                      </a:pPr>
+                      <a:r>
+                        <a:rPr lang="en-US" sz="950" dirty="0">
+                          <a:solidFill>
+                            <a:srgbClr val="1F2937"/>
+                          </a:solidFill>
+                          <a:latin typeface="Calibri" pitchFamily="34" charset="0"/>
+                          <a:ea typeface="Calibri" pitchFamily="34" charset="-122"/>
+                          <a:cs typeface="Calibri" pitchFamily="34" charset="-120"/>
+                        </a:rPr>
+                        <a:t>2.6K / 3.5K</a:t>
+                      </a:r>
+                      <a:endParaRPr lang="en-US" sz="950" dirty="0">
+                        <a:latin typeface="Calibri" charset="0"/>
+                        <a:ea typeface="Calibri" charset="0"/>
+                        <a:cs typeface="Calibri" charset="0"/>
+                      </a:endParaRPr>
+                    </a:p>
+                  </a:txBody>
+                  <a:tcPr marL="36576" marR="36576" marT="36576" marB="36576" anchor="ctr">
+                    <a:lnL w="6350" cap="flat" cmpd="sng" algn="ctr">
+                      <a:solidFill>
+                        <a:srgbClr val="D1D5DB"/>
+                      </a:solidFill>
+                      <a:prstDash val="solid"/>
+                      <a:round/>
+                      <a:headEnd type="none" w="med" len="med"/>
+                      <a:tailEnd type="none" w="med" len="med"/>
+                    </a:lnL>
+                    <a:lnR w="6350" cap="flat" cmpd="sng" algn="ctr">
+                      <a:solidFill>
+                        <a:srgbClr val="D1D5DB"/>
+                      </a:solidFill>
+                      <a:prstDash val="solid"/>
+                      <a:round/>
+                      <a:headEnd type="none" w="med" len="med"/>
+                      <a:tailEnd type="none" w="med" len="med"/>
+                    </a:lnR>
+                    <a:lnT w="6350" cap="flat" cmpd="sng" algn="ctr">
+                      <a:solidFill>
+                        <a:srgbClr val="D1D5DB"/>
+                      </a:solidFill>
+                      <a:prstDash val="solid"/>
+                      <a:round/>
+                      <a:headEnd type="none" w="med" len="med"/>
+                      <a:tailEnd type="none" w="med" len="med"/>
+                    </a:lnT>
+                    <a:lnB w="6350" cap="flat" cmpd="sng" algn="ctr">
+                      <a:solidFill>
+                        <a:srgbClr val="D1D5DB"/>
+                      </a:solidFill>
+                      <a:prstDash val="solid"/>
+                      <a:round/>
+                      <a:headEnd type="none" w="med" len="med"/>
+                      <a:tailEnd type="none" w="med" len="med"/>
+                    </a:lnB>
+                    <a:solidFill>
+                      <a:srgbClr val="F5F7FA"/>
+                    </a:solidFill>
+                  </a:tcPr>
+                </a:tc>
+                <a:tc>
+                  <a:txBody>
+                    <a:bodyPr/>
+                    <a:lstStyle/>
+                    <a:p>
+                      <a:pPr algn="ctr" indent="0" marL="0">
+                        <a:buNone/>
+                      </a:pPr>
+                      <a:r>
+                        <a:rPr lang="en-US" sz="950" dirty="0">
+                          <a:solidFill>
+                            <a:srgbClr val="1F2937"/>
+                          </a:solidFill>
+                          <a:latin typeface="Calibri" pitchFamily="34" charset="0"/>
+                          <a:ea typeface="Calibri" pitchFamily="34" charset="-122"/>
+                          <a:cs typeface="Calibri" pitchFamily="34" charset="-120"/>
+                        </a:rPr>
+                        <a:t>$0.014</a:t>
+                      </a:r>
+                      <a:endParaRPr lang="en-US" sz="950" dirty="0">
+                        <a:latin typeface="Calibri" charset="0"/>
+                        <a:ea typeface="Calibri" charset="0"/>
+                        <a:cs typeface="Calibri" charset="0"/>
+                      </a:endParaRPr>
+                    </a:p>
+                  </a:txBody>
+                  <a:tcPr marL="36576" marR="36576" marT="36576" marB="36576" anchor="ctr">
+                    <a:lnL w="6350" cap="flat" cmpd="sng" algn="ctr">
+                      <a:solidFill>
+                        <a:srgbClr val="D1D5DB"/>
+                      </a:solidFill>
+                      <a:prstDash val="solid"/>
+                      <a:round/>
+                      <a:headEnd type="none" w="med" len="med"/>
+                      <a:tailEnd type="none" w="med" len="med"/>
+                    </a:lnL>
+                    <a:lnR w="6350" cap="flat" cmpd="sng" algn="ctr">
+                      <a:solidFill>
+                        <a:srgbClr val="D1D5DB"/>
+                      </a:solidFill>
+                      <a:prstDash val="solid"/>
+                      <a:round/>
+                      <a:headEnd type="none" w="med" len="med"/>
+                      <a:tailEnd type="none" w="med" len="med"/>
+                    </a:lnR>
+                    <a:lnT w="6350" cap="flat" cmpd="sng" algn="ctr">
+                      <a:solidFill>
+                        <a:srgbClr val="D1D5DB"/>
+                      </a:solidFill>
+                      <a:prstDash val="solid"/>
+                      <a:round/>
+                      <a:headEnd type="none" w="med" len="med"/>
+                      <a:tailEnd type="none" w="med" len="med"/>
+                    </a:lnT>
+                    <a:lnB w="6350" cap="flat" cmpd="sng" algn="ctr">
+                      <a:solidFill>
+                        <a:srgbClr val="D1D5DB"/>
+                      </a:solidFill>
+                      <a:prstDash val="solid"/>
+                      <a:round/>
+                      <a:headEnd type="none" w="med" len="med"/>
+                      <a:tailEnd type="none" w="med" len="med"/>
+                    </a:lnB>
+                    <a:solidFill>
+                      <a:srgbClr val="F5F7FA"/>
                     </a:solidFill>
                   </a:tcPr>
                 </a:tc>
@@ -22417,7 +22759,7 @@
                 <a:ea typeface="Calibri" pitchFamily="34" charset="-122"/>
                 <a:cs typeface="Calibri" pitchFamily="34" charset="-120"/>
               </a:rPr>
-              <a:t>Using top-10 retrieval as the only baseline inflates any memory mechanism by 19–37 pp. The +42 headline is therefore reported next to +21 (weak reader) and −6 (strong reader), never alone.</a:t>
+              <a:t>Using top-10 retrieval as the only baseline inflates any memory mechanism by 19–37 pp. The +42 headline is therefore reported next to +21 (weak reader) and −6 / −2 (strong reader), never alone. With the ledger at 140/140 gold rows, reader scores still move 3–4 pp between runs (97.1 / 93.6): single 140-q runs cannot separate 93 from 97 — repeat runs or the full set are needed for such claims.</a:t>
             </a:r>
             <a:endParaRPr lang="en-US" sz="1150" dirty="0"/>
           </a:p>
@@ -24306,9 +24648,9 @@
             <a:tbl>
               <a:tblPr/>
               <a:tblGrid>
-                <a:gridCol w="1828800"/>
-                <a:gridCol w="822960"/>
-                <a:gridCol w="640080"/>
+                <a:gridCol w="1554480"/>
+                <a:gridCol w="1005840"/>
+                <a:gridCol w="731520"/>
               </a:tblGrid>
               <a:tr h="310896">
                 <a:tc>
@@ -24396,7 +24738,7 @@
                           <a:ea typeface="Calibri" pitchFamily="34" charset="-122"/>
                           <a:cs typeface="Calibri" pitchFamily="34" charset="-120"/>
                         </a:rPr>
-                        <a:t>acc</a:t>
+                        <a:t>acc haiku / Sonnet 5</a:t>
                       </a:r>
                       <a:endParaRPr lang="en-US" sz="950" dirty="0">
                         <a:latin typeface="Calibri" charset="0"/>
@@ -24602,7 +24944,7 @@
                           <a:ea typeface="Calibri" pitchFamily="34" charset="-122"/>
                           <a:cs typeface="Calibri" pitchFamily="34" charset="-120"/>
                         </a:rPr>
-                        <a:t>61.7</a:t>
+                        <a:t>61.7 / 74.2</a:t>
                       </a:r>
                       <a:endParaRPr lang="en-US" sz="950" dirty="0">
                         <a:latin typeface="Calibri" charset="0"/>
@@ -24670,7 +25012,7 @@
                           <a:ea typeface="Calibri" pitchFamily="34" charset="-122"/>
                           <a:cs typeface="Calibri" pitchFamily="34" charset="-120"/>
                         </a:rPr>
-                        <a:t>8.8K</a:t>
+                        <a:t>8.8K / 11.5K</a:t>
                       </a:r>
                       <a:endParaRPr lang="en-US" sz="950" dirty="0">
                         <a:latin typeface="Calibri" charset="0"/>
@@ -24808,7 +25150,7 @@
                           <a:ea typeface="Calibri" pitchFamily="34" charset="-122"/>
                           <a:cs typeface="Calibri" pitchFamily="34" charset="-120"/>
                         </a:rPr>
-                        <a:t>54.2</a:t>
+                        <a:t>54.2 / 73.3</a:t>
                       </a:r>
                       <a:endParaRPr lang="en-US" sz="950" dirty="0">
                         <a:latin typeface="Calibri" charset="0"/>
@@ -24876,7 +25218,7 @@
                           <a:ea typeface="Calibri" pitchFamily="34" charset="-122"/>
                           <a:cs typeface="Calibri" pitchFamily="34" charset="-120"/>
                         </a:rPr>
-                        <a:t>20.9K</a:t>
+                        <a:t>20.9K / 27.2K</a:t>
                       </a:r>
                       <a:endParaRPr lang="en-US" sz="950" dirty="0">
                         <a:latin typeface="Calibri" charset="0"/>
@@ -25014,7 +25356,7 @@
                           <a:ea typeface="Calibri" pitchFamily="34" charset="-122"/>
                           <a:cs typeface="Calibri" pitchFamily="34" charset="-120"/>
                         </a:rPr>
-                        <a:t>38.3</a:t>
+                        <a:t>38.3 / 67.5</a:t>
                       </a:r>
                       <a:endParaRPr lang="en-US" sz="950" dirty="0">
                         <a:latin typeface="Calibri" charset="0"/>
@@ -25082,7 +25424,7 @@
                           <a:ea typeface="Calibri" pitchFamily="34" charset="-122"/>
                           <a:cs typeface="Calibri" pitchFamily="34" charset="-120"/>
                         </a:rPr>
-                        <a:t>8.9K</a:t>
+                        <a:t>8.9K / 11.6K</a:t>
                       </a:r>
                       <a:endParaRPr lang="en-US" sz="950" dirty="0">
                         <a:latin typeface="Calibri" charset="0"/>
@@ -25564,7 +25906,7 @@
                           <a:ea typeface="Calibri" pitchFamily="34" charset="-122"/>
                           <a:cs typeface="Calibri" pitchFamily="34" charset="-120"/>
                         </a:rPr>
-                        <a:t>haiku full text</a:t>
+                        <a:t>full text (plain)</a:t>
                       </a:r>
                       <a:endParaRPr lang="en-US" sz="950" dirty="0">
                         <a:latin typeface="Calibri" charset="0"/>
@@ -25632,7 +25974,7 @@
                           <a:ea typeface="Calibri" pitchFamily="34" charset="-122"/>
                           <a:cs typeface="Calibri" pitchFamily="34" charset="-120"/>
                         </a:rPr>
-                        <a:t>7.5</a:t>
+                        <a:t>7.5 / 54.9*</a:t>
                       </a:r>
                       <a:endParaRPr lang="en-US" sz="950" dirty="0">
                         <a:latin typeface="Calibri" charset="0"/>
@@ -25700,7 +26042,7 @@
                           <a:ea typeface="Calibri" pitchFamily="34" charset="-122"/>
                           <a:cs typeface="Calibri" pitchFamily="34" charset="-120"/>
                         </a:rPr>
-                        <a:t>103.8K</a:t>
+                        <a:t>103.8K / 142K</a:t>
                       </a:r>
                       <a:endParaRPr lang="en-US" sz="950" dirty="0">
                         <a:latin typeface="Calibri" charset="0"/>
@@ -27224,7 +27566,7 @@
                 <a:ea typeface="Calibri" pitchFamily="34" charset="-122"/>
                 <a:cs typeface="Calibri" pitchFamily="34" charset="-120"/>
               </a:rPr>
-              <a:t>104K: retrieval collapses first (top-10 sees 38.8% of anchors); at equal token budget the projection beats top-100 by 23.3 pp (p = 2e-4); full text is unusable.</a:t>
+              <a:t>104K: retrieval collapses first (top-10 sees 38.8% of anchors); at equal token budget the projection beats top-100 by 23.3 pp with haiku (p = 2e-4) and by 6.7 pp with Sonnet 5 (n.s.); full text is unusable for haiku and reaches only 54.9 for Sonnet 5 (*n = 82, budget stop; 18% of calls truncated at the output cap).</a:t>
             </a:r>
             <a:endParaRPr lang="en-US" sz="1100" dirty="0"/>
           </a:p>
@@ -33626,7 +33968,7 @@
                 <a:ea typeface="Calibri" pitchFamily="34" charset="-122"/>
                 <a:cs typeface="Calibri" pitchFamily="34" charset="-120"/>
               </a:rPr>
-              <a:t>Human agreement is fair (α ≈ 0.3–0.45); the v2.5 human review has not started; the 560-q table uses the v2.4-corpus store; the partial v2.5-corpus rerun (36 chains) agrees with it within noise.</a:t>
+              <a:t>Human agreement is fair (α ≈ 0.3–0.45); the v2.5 human review has not started; the 560-q table uses the v2.4-corpus store; the partial v2.5-corpus rerun (36 chains) agrees with it within noise; write-side extraction is nondeterministic (two passes overlap 2–33% of cards) and 140-q reader runs jitter 3–4 pp.</a:t>
             </a:r>
             <a:endParaRPr lang="en-US" sz="1250" dirty="0"/>
           </a:p>
@@ -33750,7 +34092,7 @@
                 <a:ea typeface="Calibri" pitchFamily="34" charset="-122"/>
                 <a:cs typeface="Calibri" pitchFamily="34" charset="-120"/>
               </a:rPr>
-              <a:t>Run the two missing cells: 104K store with a strong reader (~$30) and a render-matched control (same layout, mechanism off); then a full v2.5-corpus rerun once the human review settles the corpus.</a:t>
+              <a:t>Running now: render-matched control (layout kept, compile off) and a second-family judge re-judging the main table; finish the 104K full-context arm (38 questions) so the store-level CI closes; then a full v2.5-corpus rerun once the human review settles the corpus.</a:t>
             </a:r>
             <a:endParaRPr lang="en-US" sz="1250" dirty="0"/>
           </a:p>

--- a/results/weekly_report_20260904.pptx
+++ b/results/weekly_report_20260904.pptx
@@ -5662,7 +5662,7 @@
                 <a:gridCol w="2194560"/>
                 <a:gridCol w="2560320"/>
               </a:tblGrid>
-              <a:tr h="566928">
+              <a:tr h="512064">
                 <a:tc>
                   <a:txBody>
                     <a:bodyPr/>
@@ -5672,7 +5672,7 @@
                         <a:buNone/>
                       </a:pPr>
                       <a:r>
-                        <a:rPr lang="en-US" sz="1050" b="1" dirty="0">
+                        <a:rPr lang="en-US" sz="950" b="1" dirty="0">
                           <a:solidFill>
                             <a:srgbClr val="FFFFFF"/>
                           </a:solidFill>
@@ -5682,7 +5682,7 @@
                         </a:rPr>
                         <a:t>Setting</a:t>
                       </a:r>
-                      <a:endParaRPr lang="en-US" sz="1050" dirty="0">
+                      <a:endParaRPr lang="en-US" sz="950" dirty="0">
                         <a:latin typeface="Calibri" charset="0"/>
                         <a:ea typeface="Calibri" charset="0"/>
                         <a:cs typeface="Calibri" charset="0"/>
@@ -5740,7 +5740,7 @@
                         <a:buNone/>
                       </a:pPr>
                       <a:r>
-                        <a:rPr lang="en-US" sz="1050" b="1" dirty="0">
+                        <a:rPr lang="en-US" sz="950" b="1" dirty="0">
                           <a:solidFill>
                             <a:srgbClr val="FFFFFF"/>
                           </a:solidFill>
@@ -5750,7 +5750,7 @@
                         </a:rPr>
                         <a:t>Full context</a:t>
                       </a:r>
-                      <a:endParaRPr lang="en-US" sz="1050" dirty="0">
+                      <a:endParaRPr lang="en-US" sz="950" dirty="0">
                         <a:latin typeface="Calibri" charset="0"/>
                         <a:ea typeface="Calibri" charset="0"/>
                         <a:cs typeface="Calibri" charset="0"/>
@@ -5808,7 +5808,7 @@
                         <a:buNone/>
                       </a:pPr>
                       <a:r>
-                        <a:rPr lang="en-US" sz="1050" b="1" dirty="0">
+                        <a:rPr lang="en-US" sz="950" b="1" dirty="0">
                           <a:solidFill>
                             <a:srgbClr val="FFFFFF"/>
                           </a:solidFill>
@@ -5818,7 +5818,7 @@
                         </a:rPr>
                         <a:t>Best retrieval</a:t>
                       </a:r>
-                      <a:endParaRPr lang="en-US" sz="1050" dirty="0">
+                      <a:endParaRPr lang="en-US" sz="950" dirty="0">
                         <a:latin typeface="Calibri" charset="0"/>
                         <a:ea typeface="Calibri" charset="0"/>
                         <a:cs typeface="Calibri" charset="0"/>
@@ -5876,7 +5876,7 @@
                         <a:buNone/>
                       </a:pPr>
                       <a:r>
-                        <a:rPr lang="en-US" sz="1050" b="1" dirty="0">
+                        <a:rPr lang="en-US" sz="950" b="1" dirty="0">
                           <a:solidFill>
                             <a:srgbClr val="FFFFFF"/>
                           </a:solidFill>
@@ -5886,7 +5886,7 @@
                         </a:rPr>
                         <a:t>QVF ledger</a:t>
                       </a:r>
-                      <a:endParaRPr lang="en-US" sz="1050" dirty="0">
+                      <a:endParaRPr lang="en-US" sz="950" dirty="0">
                         <a:latin typeface="Calibri" charset="0"/>
                         <a:ea typeface="Calibri" charset="0"/>
                         <a:cs typeface="Calibri" charset="0"/>
@@ -5944,7 +5944,7 @@
                         <a:buNone/>
                       </a:pPr>
                       <a:r>
-                        <a:rPr lang="en-US" sz="1050" b="1" dirty="0">
+                        <a:rPr lang="en-US" sz="950" b="1" dirty="0">
                           <a:solidFill>
                             <a:srgbClr val="FFFFFF"/>
                           </a:solidFill>
@@ -5954,7 +5954,7 @@
                         </a:rPr>
                         <a:t>Reading</a:t>
                       </a:r>
-                      <a:endParaRPr lang="en-US" sz="1050" dirty="0">
+                      <a:endParaRPr lang="en-US" sz="950" dirty="0">
                         <a:latin typeface="Calibri" charset="0"/>
                         <a:ea typeface="Calibri" charset="0"/>
                         <a:cs typeface="Calibri" charset="0"/>
@@ -6004,7 +6004,7 @@
                   </a:tcPr>
                 </a:tc>
               </a:tr>
-              <a:tr h="566928">
+              <a:tr h="512064">
                 <a:tc>
                   <a:txBody>
                     <a:bodyPr/>
@@ -6014,7 +6014,7 @@
                         <a:buNone/>
                       </a:pPr>
                       <a:r>
-                        <a:rPr lang="en-US" sz="1050" dirty="0">
+                        <a:rPr lang="en-US" sz="950" dirty="0">
                           <a:solidFill>
                             <a:srgbClr val="1F2937"/>
                           </a:solidFill>
@@ -6024,7 +6024,7 @@
                         </a:rPr>
                         <a:t>14K store · weak reader (haiku-4.5)</a:t>
                       </a:r>
-                      <a:endParaRPr lang="en-US" sz="1050" dirty="0">
+                      <a:endParaRPr lang="en-US" sz="950" dirty="0">
                         <a:latin typeface="Calibri" charset="0"/>
                         <a:ea typeface="Calibri" charset="0"/>
                         <a:cs typeface="Calibri" charset="0"/>
@@ -6082,7 +6082,7 @@
                         <a:buNone/>
                       </a:pPr>
                       <a:r>
-                        <a:rPr lang="en-US" sz="1050" dirty="0">
+                        <a:rPr lang="en-US" sz="950" dirty="0">
                           <a:solidFill>
                             <a:srgbClr val="1F2937"/>
                           </a:solidFill>
@@ -6092,7 +6092,7 @@
                         </a:rPr>
                         <a:t>70.0 (13.6K tok)</a:t>
                       </a:r>
-                      <a:endParaRPr lang="en-US" sz="1050" dirty="0">
+                      <a:endParaRPr lang="en-US" sz="950" dirty="0">
                         <a:latin typeface="Calibri" charset="0"/>
                         <a:ea typeface="Calibri" charset="0"/>
                         <a:cs typeface="Calibri" charset="0"/>
@@ -6150,7 +6150,7 @@
                         <a:buNone/>
                       </a:pPr>
                       <a:r>
-                        <a:rPr lang="en-US" sz="1050" dirty="0">
+                        <a:rPr lang="en-US" sz="950" dirty="0">
                           <a:solidFill>
                             <a:srgbClr val="1F2937"/>
                           </a:solidFill>
@@ -6160,7 +6160,7 @@
                         </a:rPr>
                         <a:t>62.9 (top-50)</a:t>
                       </a:r>
-                      <a:endParaRPr lang="en-US" sz="1050" dirty="0">
+                      <a:endParaRPr lang="en-US" sz="950" dirty="0">
                         <a:latin typeface="Calibri" charset="0"/>
                         <a:ea typeface="Calibri" charset="0"/>
                         <a:cs typeface="Calibri" charset="0"/>
@@ -6218,7 +6218,7 @@
                         <a:buNone/>
                       </a:pPr>
                       <a:r>
-                        <a:rPr lang="en-US" sz="1050" dirty="0">
+                        <a:rPr lang="en-US" sz="950" dirty="0">
                           <a:solidFill>
                             <a:srgbClr val="1F2937"/>
                           </a:solidFill>
@@ -6228,7 +6228,7 @@
                         </a:rPr>
                         <a:t>91.4 (2.8K tok)</a:t>
                       </a:r>
-                      <a:endParaRPr lang="en-US" sz="1050" dirty="0">
+                      <a:endParaRPr lang="en-US" sz="950" dirty="0">
                         <a:latin typeface="Calibri" charset="0"/>
                         <a:ea typeface="Calibri" charset="0"/>
                         <a:cs typeface="Calibri" charset="0"/>
@@ -6286,7 +6286,7 @@
                         <a:buNone/>
                       </a:pPr>
                       <a:r>
-                        <a:rPr lang="en-US" sz="1050" dirty="0">
+                        <a:rPr lang="en-US" sz="950" dirty="0">
                           <a:solidFill>
                             <a:srgbClr val="1F2937"/>
                           </a:solidFill>
@@ -6296,7 +6296,7 @@
                         </a:rPr>
                         <a:t>+21.4 vs full context, p = 5e-6; 1/2.8 the cost</a:t>
                       </a:r>
-                      <a:endParaRPr lang="en-US" sz="1050" dirty="0">
+                      <a:endParaRPr lang="en-US" sz="950" dirty="0">
                         <a:latin typeface="Calibri" charset="0"/>
                         <a:ea typeface="Calibri" charset="0"/>
                         <a:cs typeface="Calibri" charset="0"/>
@@ -6346,7 +6346,7 @@
                   </a:tcPr>
                 </a:tc>
               </a:tr>
-              <a:tr h="566928">
+              <a:tr h="512064">
                 <a:tc>
                   <a:txBody>
                     <a:bodyPr/>
@@ -6356,7 +6356,7 @@
                         <a:buNone/>
                       </a:pPr>
                       <a:r>
-                        <a:rPr lang="en-US" sz="1050" dirty="0">
+                        <a:rPr lang="en-US" sz="950" dirty="0">
                           <a:solidFill>
                             <a:srgbClr val="1F2937"/>
                           </a:solidFill>
@@ -6366,7 +6366,7 @@
                         </a:rPr>
                         <a:t>14K store · strong reader (Sonnet 5)</a:t>
                       </a:r>
-                      <a:endParaRPr lang="en-US" sz="1050" dirty="0">
+                      <a:endParaRPr lang="en-US" sz="950" dirty="0">
                         <a:latin typeface="Calibri" charset="0"/>
                         <a:ea typeface="Calibri" charset="0"/>
                         <a:cs typeface="Calibri" charset="0"/>
@@ -6424,7 +6424,7 @@
                         <a:buNone/>
                       </a:pPr>
                       <a:r>
-                        <a:rPr lang="en-US" sz="1050" dirty="0">
+                        <a:rPr lang="en-US" sz="950" dirty="0">
                           <a:solidFill>
                             <a:srgbClr val="1F2937"/>
                           </a:solidFill>
@@ -6434,7 +6434,7 @@
                         </a:rPr>
                         <a:t>97.1 (18.5K tok)</a:t>
                       </a:r>
-                      <a:endParaRPr lang="en-US" sz="1050" dirty="0">
+                      <a:endParaRPr lang="en-US" sz="950" dirty="0">
                         <a:latin typeface="Calibri" charset="0"/>
                         <a:ea typeface="Calibri" charset="0"/>
                         <a:cs typeface="Calibri" charset="0"/>
@@ -6492,7 +6492,7 @@
                         <a:buNone/>
                       </a:pPr>
                       <a:r>
-                        <a:rPr lang="en-US" sz="1050" dirty="0">
+                        <a:rPr lang="en-US" sz="950" dirty="0">
                           <a:solidFill>
                             <a:srgbClr val="1F2937"/>
                           </a:solidFill>
@@ -6502,7 +6502,7 @@
                         </a:rPr>
                         <a:t>70.7 (top-10)</a:t>
                       </a:r>
-                      <a:endParaRPr lang="en-US" sz="1050" dirty="0">
+                      <a:endParaRPr lang="en-US" sz="950" dirty="0">
                         <a:latin typeface="Calibri" charset="0"/>
                         <a:ea typeface="Calibri" charset="0"/>
                         <a:cs typeface="Calibri" charset="0"/>
@@ -6560,7 +6560,7 @@
                         <a:buNone/>
                       </a:pPr>
                       <a:r>
-                        <a:rPr lang="en-US" sz="1050" dirty="0">
+                        <a:rPr lang="en-US" sz="950" dirty="0">
                           <a:solidFill>
                             <a:srgbClr val="1F2937"/>
                           </a:solidFill>
@@ -6570,7 +6570,7 @@
                         </a:rPr>
                         <a:t>90.7 (3.7K tok)</a:t>
                       </a:r>
-                      <a:endParaRPr lang="en-US" sz="1050" dirty="0">
+                      <a:endParaRPr lang="en-US" sz="950" dirty="0">
                         <a:latin typeface="Calibri" charset="0"/>
                         <a:ea typeface="Calibri" charset="0"/>
                         <a:cs typeface="Calibri" charset="0"/>
@@ -6628,7 +6628,7 @@
                         <a:buNone/>
                       </a:pPr>
                       <a:r>
-                        <a:rPr lang="en-US" sz="1050" dirty="0">
+                        <a:rPr lang="en-US" sz="950" dirty="0">
                           <a:solidFill>
                             <a:srgbClr val="1F2937"/>
                           </a:solidFill>
@@ -6638,7 +6638,7 @@
                         </a:rPr>
                         <a:t>−6.4, p = 0.035: the reader does the four sub-tasks itself; only the 2.8× cost edge remains</a:t>
                       </a:r>
-                      <a:endParaRPr lang="en-US" sz="1050" dirty="0">
+                      <a:endParaRPr lang="en-US" sz="950" dirty="0">
                         <a:latin typeface="Calibri" charset="0"/>
                         <a:ea typeface="Calibri" charset="0"/>
                         <a:cs typeface="Calibri" charset="0"/>
@@ -6688,7 +6688,7 @@
                   </a:tcPr>
                 </a:tc>
               </a:tr>
-              <a:tr h="566928">
+              <a:tr h="512064">
                 <a:tc>
                   <a:txBody>
                     <a:bodyPr/>
@@ -6698,7 +6698,7 @@
                         <a:buNone/>
                       </a:pPr>
                       <a:r>
-                        <a:rPr lang="en-US" sz="1050" dirty="0">
+                        <a:rPr lang="en-US" sz="950" dirty="0">
                           <a:solidFill>
                             <a:srgbClr val="1F2937"/>
                           </a:solidFill>
@@ -6708,7 +6708,7 @@
                         </a:rPr>
                         <a:t>104K store · weak reader (30 stores / 120 q)</a:t>
                       </a:r>
-                      <a:endParaRPr lang="en-US" sz="1050" dirty="0">
+                      <a:endParaRPr lang="en-US" sz="950" dirty="0">
                         <a:latin typeface="Calibri" charset="0"/>
                         <a:ea typeface="Calibri" charset="0"/>
                         <a:cs typeface="Calibri" charset="0"/>
@@ -6766,7 +6766,7 @@
                         <a:buNone/>
                       </a:pPr>
                       <a:r>
-                        <a:rPr lang="en-US" sz="1050" dirty="0">
+                        <a:rPr lang="en-US" sz="950" dirty="0">
                           <a:solidFill>
                             <a:srgbClr val="1F2937"/>
                           </a:solidFill>
@@ -6776,7 +6776,7 @@
                         </a:rPr>
                         <a:t>7.5 (103.8K tok)</a:t>
                       </a:r>
-                      <a:endParaRPr lang="en-US" sz="1050" dirty="0">
+                      <a:endParaRPr lang="en-US" sz="950" dirty="0">
                         <a:latin typeface="Calibri" charset="0"/>
                         <a:ea typeface="Calibri" charset="0"/>
                         <a:cs typeface="Calibri" charset="0"/>
@@ -6834,7 +6834,7 @@
                         <a:buNone/>
                       </a:pPr>
                       <a:r>
-                        <a:rPr lang="en-US" sz="1050" dirty="0">
+                        <a:rPr lang="en-US" sz="950" dirty="0">
                           <a:solidFill>
                             <a:srgbClr val="1F2937"/>
                           </a:solidFill>
@@ -6844,7 +6844,7 @@
                         </a:rPr>
                         <a:t>38.3 (top-100, 8.9K tok)</a:t>
                       </a:r>
-                      <a:endParaRPr lang="en-US" sz="1050" dirty="0">
+                      <a:endParaRPr lang="en-US" sz="950" dirty="0">
                         <a:latin typeface="Calibri" charset="0"/>
                         <a:ea typeface="Calibri" charset="0"/>
                         <a:cs typeface="Calibri" charset="0"/>
@@ -6902,7 +6902,7 @@
                         <a:buNone/>
                       </a:pPr>
                       <a:r>
-                        <a:rPr lang="en-US" sz="1050" dirty="0">
+                        <a:rPr lang="en-US" sz="950" dirty="0">
                           <a:solidFill>
                             <a:srgbClr val="1F2937"/>
                           </a:solidFill>
@@ -6912,7 +6912,7 @@
                         </a:rPr>
                         <a:t>61.7 projection (8.8K) · 54.2 full ledger</a:t>
                       </a:r>
-                      <a:endParaRPr lang="en-US" sz="1050" dirty="0">
+                      <a:endParaRPr lang="en-US" sz="950" dirty="0">
                         <a:latin typeface="Calibri" charset="0"/>
                         <a:ea typeface="Calibri" charset="0"/>
                         <a:cs typeface="Calibri" charset="0"/>
@@ -6970,7 +6970,7 @@
                         <a:buNone/>
                       </a:pPr>
                       <a:r>
-                        <a:rPr lang="en-US" sz="1050" dirty="0">
+                        <a:rPr lang="en-US" sz="950" dirty="0">
                           <a:solidFill>
                             <a:srgbClr val="1F2937"/>
                           </a:solidFill>
@@ -6980,7 +6980,7 @@
                         </a:rPr>
                         <a:t>+23.3 vs budget-matched top-100, p = 2e-4; retrieval collapses first (top-10 reaches 38.8% of anchors)</a:t>
                       </a:r>
-                      <a:endParaRPr lang="en-US" sz="1050" dirty="0">
+                      <a:endParaRPr lang="en-US" sz="950" dirty="0">
                         <a:latin typeface="Calibri" charset="0"/>
                         <a:ea typeface="Calibri" charset="0"/>
                         <a:cs typeface="Calibri" charset="0"/>
@@ -7030,7 +7030,7 @@
                   </a:tcPr>
                 </a:tc>
               </a:tr>
-              <a:tr h="566928">
+              <a:tr h="512064">
                 <a:tc>
                   <a:txBody>
                     <a:bodyPr/>
@@ -7040,7 +7040,7 @@
                         <a:buNone/>
                       </a:pPr>
                       <a:r>
-                        <a:rPr lang="en-US" sz="1050" dirty="0">
+                        <a:rPr lang="en-US" sz="950" dirty="0">
                           <a:solidFill>
                             <a:srgbClr val="1F2937"/>
                           </a:solidFill>
@@ -7050,7 +7050,7 @@
                         </a:rPr>
                         <a:t>104K store · strong reader (Sonnet 5, batch 40)</a:t>
                       </a:r>
-                      <a:endParaRPr lang="en-US" sz="1050" dirty="0">
+                      <a:endParaRPr lang="en-US" sz="950" dirty="0">
                         <a:latin typeface="Calibri" charset="0"/>
                         <a:ea typeface="Calibri" charset="0"/>
                         <a:cs typeface="Calibri" charset="0"/>
@@ -7108,7 +7108,7 @@
                         <a:buNone/>
                       </a:pPr>
                       <a:r>
-                        <a:rPr lang="en-US" sz="1050" dirty="0">
+                        <a:rPr lang="en-US" sz="950" dirty="0">
                           <a:solidFill>
                             <a:srgbClr val="1F2937"/>
                           </a:solidFill>
@@ -7116,9 +7116,9 @@
                           <a:ea typeface="Calibri" pitchFamily="34" charset="-122"/>
                           <a:cs typeface="Calibri" pitchFamily="34" charset="-120"/>
                         </a:rPr>
-                        <a:t>54.9 (142K tok; n = 82, 18% of calls hit the output cap)</a:t>
-                      </a:r>
-                      <a:endParaRPr lang="en-US" sz="1050" dirty="0">
+                        <a:t>54.9 (142K tok; n = 82, 18% capped)</a:t>
+                      </a:r>
+                      <a:endParaRPr lang="en-US" sz="950" dirty="0">
                         <a:latin typeface="Calibri" charset="0"/>
                         <a:ea typeface="Calibri" charset="0"/>
                         <a:cs typeface="Calibri" charset="0"/>
@@ -7176,7 +7176,7 @@
                         <a:buNone/>
                       </a:pPr>
                       <a:r>
-                        <a:rPr lang="en-US" sz="1050" dirty="0">
+                        <a:rPr lang="en-US" sz="950" dirty="0">
                           <a:solidFill>
                             <a:srgbClr val="1F2937"/>
                           </a:solidFill>
@@ -7186,7 +7186,7 @@
                         </a:rPr>
                         <a:t>67.5 (top-100, 11.6K tok)</a:t>
                       </a:r>
-                      <a:endParaRPr lang="en-US" sz="1050" dirty="0">
+                      <a:endParaRPr lang="en-US" sz="950" dirty="0">
                         <a:latin typeface="Calibri" charset="0"/>
                         <a:ea typeface="Calibri" charset="0"/>
                         <a:cs typeface="Calibri" charset="0"/>
@@ -7244,7 +7244,7 @@
                         <a:buNone/>
                       </a:pPr>
                       <a:r>
-                        <a:rPr lang="en-US" sz="1050" dirty="0">
+                        <a:rPr lang="en-US" sz="950" dirty="0">
                           <a:solidFill>
                             <a:srgbClr val="1F2937"/>
                           </a:solidFill>
@@ -7254,7 +7254,7 @@
                         </a:rPr>
                         <a:t>74.2 projection (11.5K) · 73.3 full ledger</a:t>
                       </a:r>
-                      <a:endParaRPr lang="en-US" sz="1050" dirty="0">
+                      <a:endParaRPr lang="en-US" sz="950" dirty="0">
                         <a:latin typeface="Calibri" charset="0"/>
                         <a:ea typeface="Calibri" charset="0"/>
                         <a:cs typeface="Calibri" charset="0"/>
@@ -7312,7 +7312,7 @@
                         <a:buNone/>
                       </a:pPr>
                       <a:r>
-                        <a:rPr lang="en-US" sz="1050" dirty="0">
+                        <a:rPr lang="en-US" sz="950" dirty="0">
                           <a:solidFill>
                             <a:srgbClr val="1F2937"/>
                           </a:solidFill>
@@ -7320,9 +7320,9 @@
                           <a:ea typeface="Calibri" pitchFamily="34" charset="-122"/>
                           <a:cs typeface="Calibri" pitchFamily="34" charset="-120"/>
                         </a:rPr>
-                        <a:t>+17.1 vs full context on the same 82 q, p = 0.024 (21-store CI crosses zero: 9 stores unfinished); projection costs 1/9 of full context</a:t>
-                      </a:r>
-                      <a:endParaRPr lang="en-US" sz="1050" dirty="0">
+                        <a:t>+17.1 vs full context on the same 82 q, p = 0.024 (store CI crosses zero, 9 stores unfinished); projection costs 1/9</a:t>
+                      </a:r>
+                      <a:endParaRPr lang="en-US" sz="950" dirty="0">
                         <a:latin typeface="Calibri" charset="0"/>
                         <a:ea typeface="Calibri" charset="0"/>
                         <a:cs typeface="Calibri" charset="0"/>
@@ -7384,8 +7384,8 @@
         </p:nvSpPr>
         <p:spPr>
           <a:xfrm>
-            <a:off x="548640" y="4343400"/>
-            <a:ext cx="11064240" cy="2011680"/>
+            <a:off x="548640" y="4572000"/>
+            <a:ext cx="11064240" cy="1828800"/>
           </a:xfrm>
           <a:prstGeom prst="rect">
             <a:avLst/>
@@ -7405,7 +7405,7 @@
               <a:buChar char="•"/>
             </a:pPr>
             <a:r>
-              <a:rPr lang="en-US" sz="1150" dirty="0">
+              <a:rPr lang="en-US" sz="1050" dirty="0">
                 <a:solidFill>
                   <a:srgbClr val="1F2937"/>
                 </a:solidFill>
@@ -7415,7 +7415,7 @@
               </a:rPr>
               <a:t>The ledger is reader-insensitive (haiku 91.4 → Sonnet 90.7, p = 1.0) while every other arm gains 18–27 pp from the stronger reader: its ceiling is set by card content, not by reading.</a:t>
             </a:r>
-            <a:endParaRPr lang="en-US" sz="1150" dirty="0"/>
+            <a:endParaRPr lang="en-US" sz="1050" dirty="0"/>
           </a:p>
           <a:p>
             <a:pPr marL="342900" indent="-342900">
@@ -7426,7 +7426,7 @@
               <a:buChar char="•"/>
             </a:pPr>
             <a:r>
-              <a:rPr lang="en-US" sz="1150" dirty="0">
+              <a:rPr lang="en-US" sz="1050" dirty="0">
                 <a:solidFill>
                   <a:srgbClr val="1F2937"/>
                 </a:solidFill>
@@ -7436,7 +7436,7 @@
               </a:rPr>
               <a:t>Write-side fixes, step by step: Sonnet-built cards 133/133 gold rows but 92.9 / 92.1 (haiku / Sonnet); slot canonicalisation alone 88.6 / 91.4; adding a rule-based assertion-type filter (drop plans, nominations, one-off tasks, restatements; 203 of 1,639 cards, zero gold rows lost) gives 93.6 / 95.0 — gap to full context now −2.1 (p = 0.51). The last 3 questions are one chain whose extraction missed 28 cards. StateMemBench (2608.19652, §3.2) reports the same pattern: 44.4% of failures under oracle retrieval are stale-state answers.</a:t>
             </a:r>
-            <a:endParaRPr lang="en-US" sz="1150" dirty="0"/>
+            <a:endParaRPr lang="en-US" sz="1050" dirty="0"/>
           </a:p>
           <a:p>
             <a:pPr marL="342900" indent="-342900">
@@ -7447,7 +7447,7 @@
               <a:buChar char="•"/>
             </a:pPr>
             <a:r>
-              <a:rPr lang="en-US" sz="1150" dirty="0">
+              <a:rPr lang="en-US" sz="1050" dirty="0">
                 <a:solidFill>
                   <a:srgbClr val="1F2937"/>
                 </a:solidFill>
@@ -7457,7 +7457,7 @@
               </a:rPr>
               <a:t>Claim, restated: the ledger is necessary when the reader is not frontier-class, or the store exceeds the context window, or cost is bound — any one of the three. Otherwise it is a cheaper, auditable layer, not a more accurate one.</a:t>
             </a:r>
-            <a:endParaRPr lang="en-US" sz="1150" dirty="0"/>
+            <a:endParaRPr lang="en-US" sz="1050" dirty="0"/>
           </a:p>
         </p:txBody>
       </p:sp>
